--- a/DEFENSA_TFM.pptx
+++ b/DEFENSA_TFM.pptx
@@ -23,9 +23,10 @@
     <p:sldId id="271" r:id="rId17"/>
     <p:sldId id="272" r:id="rId18"/>
     <p:sldId id="273" r:id="rId19"/>
+    <p:sldId id="274" r:id="rId20"/>
   </p:sldIdLst>
   <p:notesMasterIdLst>
-    <p:notesMasterId r:id="rId20"/>
+    <p:notesMasterId r:id="rId21"/>
   </p:notesMasterIdLst>
   <p:sldSz cx="12192000" cy="6858000"/>
   <p:notesSz cx="6858000" cy="12192000"/>
@@ -519,7 +520,7 @@
           <a:p>
             <a:r>
               <a:rPr lang="en-US" dirty="0"/>
-              <a:t>Buenos dias. Presento un trabajo que empezo buscando biomarcadores de cancer de pulmon y termino auditando por que esas busquedas fallan. El giro no fue una eleccion de partida: fue lo que impusieron los datos.</a:t>
+              <a:t>Buenos dias. Presento un framework que integra modelos de lenguaje y aprendizaje automatico para identificar biomarcadores transcriptomicos. Tiene tres capas: curacion clinica con LLM, identificacion de firmas, y una capa de validacion. La tesis del trabajo es que esa tercera capa es la que decide si las otras dos sirven de algo, y voy a demostrarlo aplicandola a dos tareas: una la supera y la otra no.</a:t>
             </a:r>
             <a:endParaRPr lang="en-US" dirty="0"/>
           </a:p>
@@ -959,7 +960,7 @@
           <a:p>
             <a:r>
               <a:rPr lang="en-US" dirty="0"/>
-              <a:t>Esta es la aportacion que defiendo: no una firma, sino seis controles concretos, cada uno derivado de un fallo que este trabajo encontro y midio. Son aplicables a cualquier pipeline de descubrimiento sobre repositorios publicos.</a:t>
+              <a:t>Esta es la salida del framework. Mil ciento setenta y cuatro genes superan la validacion, y con solo veinte se conserva el rendimiento: AUC 0,966 en validacion externa. Eso es un panel utilizable, no una lista de mil genes. Y la validacion externa mas importante es la tercera: recupera dieciocho de veinte marcadores que se usan en inmunohistoquimica clinica, sin que hayan participado en la seleccion. El framework encuentra biologia conocida por su cuenta. En el pie esta el contraste: la misma capa, sin cambiar un criterio, retiene muchos menos genes en la tarea que no supera la validacion.</a:t>
             </a:r>
             <a:endParaRPr lang="en-US" dirty="0"/>
           </a:p>
@@ -1047,7 +1048,7 @@
           <a:p>
             <a:r>
               <a:rPr lang="en-US" dirty="0"/>
-              <a:t>Tres cifras resumen el trabajo. El rendimiento real es mas bajo que el reportado. Ninguno de los siete genes replica. Y el marco si detecta biologia cuando la hay. La conclusion es la de abajo: el framework es valido, el hallazgo no lo era, y lo he medido en lugar de afirmarlo.</a:t>
+              <a:t>Esta es la aportacion que defiendo: no una firma, sino seis controles concretos, cada uno derivado de un fallo que este trabajo encontro y midio. Son aplicables a cualquier pipeline de descubrimiento sobre repositorios publicos.</a:t>
             </a:r>
             <a:endParaRPr lang="en-US" dirty="0"/>
           </a:p>
@@ -1135,7 +1136,7 @@
           <a:p>
             <a:r>
               <a:rPr lang="en-US" dirty="0"/>
-              <a:t>Tres lineas, y ninguna necesita datos nuevos. Lo mas elegante: las dos cohortes que rompian el clasificador binario, por no tener controles, son cohortes de supervivencia. Para la pregunta correcta pasan de ser el problema a ser el mejor activo del trabajo.</a:t>
+              <a:t>Tres cifras. La primera es lo que el framework entrega: un panel de veinte genes validado. La segunda es lo que rechaza: ninguno de los siete genes de mi primera firma supera la validacion. La tercera es cuanto se corrige el rendimiento al medir bien. Y la frase de abajo es la tesis: un framework que no puede rechazar su propio resultado no esta validando, esta confirmando.</a:t>
             </a:r>
             <a:endParaRPr lang="en-US" dirty="0"/>
           </a:p>
@@ -1223,7 +1224,7 @@
           <a:p>
             <a:r>
               <a:rPr lang="en-US" dirty="0"/>
-              <a:t>Referencias metodologicas y las publicaciones originales de las cohortes. Todo el codigo esta publico, y los analisis son deterministas: dos ejecuciones producen resultados identicos.</a:t>
+              <a:t>Tres lineas, y ninguna necesita datos nuevos. Lo mas elegante: las dos cohortes que rompian el clasificador binario, por no tener controles, son cohortes de supervivencia. Para la pregunta correcta pasan de ser el problema a ser el mejor activo del trabajo.</a:t>
             </a:r>
             <a:endParaRPr lang="en-US" dirty="0"/>
           </a:p>
@@ -1311,7 +1312,7 @@
           <a:p>
             <a:r>
               <a:rPr lang="en-US" dirty="0"/>
-              <a:t>Gracias. Quedo a disposicion del tribunal para las preguntas.</a:t>
+              <a:t>Referencias metodologicas y las publicaciones originales de las cohortes. Todo el codigo esta publico, y los analisis son deterministas: dos ejecuciones producen resultados identicos.</a:t>
             </a:r>
             <a:endParaRPr lang="en-US" dirty="0"/>
           </a:p>
@@ -1335,6 +1336,94 @@
             <a:fld id="{F7021451-1387-4CA6-816F-3879F97B5CBC}" type="slidenum">
               <a:rPr lang="en-US"/>
               <a:t>18</a:t>
+            </a:fld>
+            <a:endParaRPr lang="en-US"/>
+          </a:p>
+        </p:txBody>
+      </p:sp>
+    </p:spTree>
+    <p:extLst>
+      <p:ext uri="{BB962C8B-B14F-4D97-AF65-F5344CB8AC3E}">
+        <p14:creationId xmlns:p14="http://schemas.microsoft.com/office/powerpoint/2010/main" val="1024086991"/>
+      </p:ext>
+    </p:extLst>
+  </p:cSld>
+  <p:clrMapOvr>
+    <a:masterClrMapping/>
+  </p:clrMapOvr>
+</p:notes>
+</file>
+
+<file path=ppt/notesSlides/notesSlide19.xml><?xml version="1.0" encoding="utf-8"?>
+<p:notes xmlns:a="http://schemas.openxmlformats.org/drawingml/2006/main" xmlns:r="http://schemas.openxmlformats.org/officeDocument/2006/relationships" xmlns:p="http://schemas.openxmlformats.org/presentationml/2006/main">
+  <p:cSld>
+    <p:spTree>
+      <p:nvGrpSpPr>
+        <p:cNvPr id="1" name=""/>
+        <p:cNvGrpSpPr/>
+        <p:nvPr/>
+      </p:nvGrpSpPr>
+      <p:grpSpPr>
+        <a:xfrm>
+          <a:off x="0" y="0"/>
+          <a:ext cx="0" cy="0"/>
+          <a:chOff x="0" y="0"/>
+          <a:chExt cx="0" cy="0"/>
+        </a:xfrm>
+      </p:grpSpPr>
+      <p:sp>
+        <p:nvSpPr>
+          <p:cNvPr id="2" name="Slide Image Placeholder 1"/>
+          <p:cNvSpPr>
+            <a:spLocks noGrp="1" noRot="1" noChangeAspect="1"/>
+          </p:cNvSpPr>
+          <p:nvPr>
+            <p:ph type="sldImg"/>
+          </p:nvPr>
+        </p:nvSpPr>
+        <p:spPr/>
+      </p:sp>
+      <p:sp>
+        <p:nvSpPr>
+          <p:cNvPr id="3" name="Notes Placeholder 2"/>
+          <p:cNvSpPr>
+            <a:spLocks noGrp="1"/>
+          </p:cNvSpPr>
+          <p:nvPr>
+            <p:ph type="body" idx="1"/>
+          </p:nvPr>
+        </p:nvSpPr>
+        <p:spPr/>
+        <p:txBody>
+          <a:bodyPr/>
+          <a:lstStyle/>
+          <a:p>
+            <a:r>
+              <a:rPr lang="en-US" dirty="0"/>
+              <a:t>Gracias. Quedo a disposicion del tribunal para las preguntas.</a:t>
+            </a:r>
+            <a:endParaRPr lang="en-US" dirty="0"/>
+          </a:p>
+        </p:txBody>
+      </p:sp>
+      <p:sp>
+        <p:nvSpPr>
+          <p:cNvPr id="4" name="Slide Number Placeholder 3"/>
+          <p:cNvSpPr>
+            <a:spLocks noGrp="1"/>
+          </p:cNvSpPr>
+          <p:nvPr>
+            <p:ph type="sldNum" sz="quarter" idx="10"/>
+          </p:nvPr>
+        </p:nvSpPr>
+        <p:spPr/>
+        <p:txBody>
+          <a:bodyPr/>
+          <a:lstStyle/>
+          <a:p>
+            <a:fld id="{F7021451-1387-4CA6-816F-3879F97B5CBC}" type="slidenum">
+              <a:rPr lang="en-US"/>
+              <a:t>19</a:t>
             </a:fld>
             <a:endParaRPr lang="en-US"/>
           </a:p>
@@ -1487,7 +1576,7 @@
           <a:p>
             <a:r>
               <a:rPr lang="en-US" dirty="0"/>
-              <a:t>Este es el giro del trabajo y quiero ser explicito sobre el. El planteamiento inicial era el de la izquierda. Los analisis de validacion mostraron tres cosas que lo impiden: la firma mide composicion tisular, su estabilidad era artefacto del diseno, y la tarea no tiene valor clinico. El pipeline funciona; la interpretacion no se sostenia.</a:t>
+              <a:t>El framework tiene tres capas. La primera y la segunda son las que anuncia el titulo: modelos de lenguaje para curar metadatos, y aprendizaje automatico para identificar firmas. La tercera es la aportacion de este trabajo. Y la tesis es esta: sin la capa de validacion el framework habria entregado una firma que no replica, y con ella entrega una que si. Voy a demostrar las dos cosas.</a:t>
             </a:r>
             <a:endParaRPr lang="en-US" dirty="0"/>
           </a:p>
@@ -2435,8 +2524,8 @@
         </p:nvSpPr>
         <p:spPr>
           <a:xfrm>
-            <a:off x="658368" y="1874520"/>
-            <a:ext cx="8778240" cy="2286000"/>
+            <a:off x="658368" y="1810512"/>
+            <a:ext cx="10241280" cy="2651760"/>
           </a:xfrm>
           <a:prstGeom prst="rect">
             <a:avLst/>
@@ -2450,12 +2539,12 @@
           <a:p>
             <a:pPr indent="0" marL="0">
               <a:lnSpc>
-                <a:spcPct val="106000"/>
+                <a:spcPct val="110000"/>
               </a:lnSpc>
               <a:buNone/>
             </a:pPr>
             <a:r>
-              <a:rPr lang="en-US" sz="4000" b="1" dirty="0">
+              <a:rPr lang="en-US" sz="3100" b="1" dirty="0">
                 <a:solidFill>
                   <a:srgbClr val="FFFFFF"/>
                 </a:solidFill>
@@ -2463,19 +2552,19 @@
                 <a:ea typeface="Cambria" pitchFamily="34" charset="-122"/>
                 <a:cs typeface="Cambria" pitchFamily="34" charset="-120"/>
               </a:rPr>
-              <a:t>Auditoría de reproducibilidad</a:t>
-            </a:r>
-            <a:endParaRPr lang="en-US" sz="4000" dirty="0"/>
+              <a:t>Framework transcriptómico basado en la integración</a:t>
+            </a:r>
+            <a:endParaRPr lang="en-US" sz="3100" dirty="0"/>
           </a:p>
           <a:p>
             <a:pPr indent="0" marL="0">
               <a:lnSpc>
-                <a:spcPct val="106000"/>
+                <a:spcPct val="110000"/>
               </a:lnSpc>
               <a:buNone/>
             </a:pPr>
             <a:r>
-              <a:rPr lang="en-US" sz="4000" b="1" dirty="0">
+              <a:rPr lang="en-US" sz="3100" b="1" dirty="0">
                 <a:solidFill>
                   <a:srgbClr val="FFFFFF"/>
                 </a:solidFill>
@@ -2483,19 +2572,19 @@
                 <a:ea typeface="Cambria" pitchFamily="34" charset="-122"/>
                 <a:cs typeface="Cambria" pitchFamily="34" charset="-120"/>
               </a:rPr>
-              <a:t>de firmas transcriptómicas</a:t>
-            </a:r>
-            <a:endParaRPr lang="en-US" sz="4000" dirty="0"/>
+              <a:t>de modelos de lenguaje y aprendizaje automático</a:t>
+            </a:r>
+            <a:endParaRPr lang="en-US" sz="3100" dirty="0"/>
           </a:p>
           <a:p>
             <a:pPr indent="0" marL="0">
               <a:lnSpc>
-                <a:spcPct val="106000"/>
+                <a:spcPct val="110000"/>
               </a:lnSpc>
               <a:buNone/>
             </a:pPr>
             <a:r>
-              <a:rPr lang="en-US" sz="4000" b="1" dirty="0">
+              <a:rPr lang="en-US" sz="3100" b="1" dirty="0">
                 <a:solidFill>
                   <a:srgbClr val="FFFFFF"/>
                 </a:solidFill>
@@ -2503,9 +2592,29 @@
                 <a:ea typeface="Cambria" pitchFamily="34" charset="-122"/>
                 <a:cs typeface="Cambria" pitchFamily="34" charset="-120"/>
               </a:rPr>
+              <a:t>para la identificación de biomarcadores</a:t>
+            </a:r>
+            <a:endParaRPr lang="en-US" sz="3100" dirty="0"/>
+          </a:p>
+          <a:p>
+            <a:pPr indent="0" marL="0">
+              <a:lnSpc>
+                <a:spcPct val="110000"/>
+              </a:lnSpc>
+              <a:buNone/>
+            </a:pPr>
+            <a:r>
+              <a:rPr lang="en-US" sz="3100" b="1" dirty="0">
+                <a:solidFill>
+                  <a:srgbClr val="FFFFFF"/>
+                </a:solidFill>
+                <a:latin typeface="Cambria" pitchFamily="34" charset="0"/>
+                <a:ea typeface="Cambria" pitchFamily="34" charset="-122"/>
+                <a:cs typeface="Cambria" pitchFamily="34" charset="-120"/>
+              </a:rPr>
               <a:t>en cáncer de pulmón</a:t>
             </a:r>
-            <a:endParaRPr lang="en-US" sz="4000" dirty="0"/>
+            <a:endParaRPr lang="en-US" sz="3100" dirty="0"/>
           </a:p>
         </p:txBody>
       </p:sp>
@@ -2517,8 +2626,8 @@
         </p:nvSpPr>
         <p:spPr>
           <a:xfrm>
-            <a:off x="658368" y="4224528"/>
-            <a:ext cx="8595360" cy="731520"/>
+            <a:off x="658368" y="4553712"/>
+            <a:ext cx="8595360" cy="694944"/>
           </a:xfrm>
           <a:prstGeom prst="rect">
             <a:avLst/>
@@ -2545,7 +2654,7 @@
                 <a:ea typeface="Cambria" pitchFamily="34" charset="-122"/>
                 <a:cs typeface="Cambria" pitchFamily="34" charset="-120"/>
               </a:rPr>
-              <a:t>Cuándo una firma molecular parece funcionar y no funciona:</a:t>
+              <a:t>Identificación, validación y auditoría de firmas moleculares</a:t>
             </a:r>
             <a:endParaRPr lang="en-US" sz="1500" dirty="0"/>
           </a:p>
@@ -2565,7 +2674,7 @@
                 <a:ea typeface="Cambria" pitchFamily="34" charset="-122"/>
                 <a:cs typeface="Cambria" pitchFamily="34" charset="-120"/>
               </a:rPr>
-              <a:t>cuatro modos de fallo silencioso en pipelines sobre datos públicos</a:t>
+              <a:t>sobre 13 cohortes públicas de NCBI GEO</a:t>
             </a:r>
             <a:endParaRPr lang="en-US" sz="1500" dirty="0"/>
           </a:p>
@@ -2579,7 +2688,7 @@
         </p:nvSpPr>
         <p:spPr>
           <a:xfrm>
-            <a:off x="658368" y="5230368"/>
+            <a:off x="658368" y="5431536"/>
             <a:ext cx="2834640" cy="0"/>
           </a:xfrm>
           <a:prstGeom prst="line">
@@ -2602,7 +2711,7 @@
         </p:nvSpPr>
         <p:spPr>
           <a:xfrm>
-            <a:off x="658368" y="5440680"/>
+            <a:off x="658368" y="5632704"/>
             <a:ext cx="5486400" cy="1005840"/>
           </a:xfrm>
           <a:prstGeom prst="rect">
@@ -5812,6 +5921,532 @@
     <p:bg>
       <p:bgPr>
         <a:solidFill>
+          <a:srgbClr val="FCFCFB"/>
+        </a:solidFill>
+      </p:bgPr>
+    </p:bg>
+    <p:spTree>
+      <p:nvGrpSpPr>
+        <p:cNvPr id="1" name=""/>
+        <p:cNvGrpSpPr/>
+        <p:nvPr/>
+      </p:nvGrpSpPr>
+      <p:grpSpPr>
+        <a:xfrm>
+          <a:off x="0" y="0"/>
+          <a:ext cx="0" cy="0"/>
+          <a:chOff x="0" y="0"/>
+          <a:chExt cx="0" cy="0"/>
+        </a:xfrm>
+      </p:grpSpPr>
+      <p:sp>
+        <p:nvSpPr>
+          <p:cNvPr id="2" name="Text 0"/>
+          <p:cNvSpPr/>
+          <p:nvPr/>
+        </p:nvSpPr>
+        <p:spPr>
+          <a:xfrm>
+            <a:off x="658368" y="182880"/>
+            <a:ext cx="10844784" cy="237744"/>
+          </a:xfrm>
+          <a:prstGeom prst="rect">
+            <a:avLst/>
+          </a:prstGeom>
+          <a:noFill/>
+          <a:ln/>
+        </p:spPr>
+        <p:txBody>
+          <a:bodyPr wrap="square" lIns="0" tIns="0" rIns="0" bIns="0" rtlCol="0" anchor="ctr"/>
+          <a:lstStyle/>
+          <a:p>
+            <a:pPr indent="0" marL="0">
+              <a:buNone/>
+            </a:pPr>
+            <a:r>
+              <a:rPr lang="en-US" sz="1000" b="1" spc="240" kern="0" dirty="0">
+                <a:solidFill>
+                  <a:srgbClr val="898781"/>
+                </a:solidFill>
+                <a:latin typeface="Calibri" pitchFamily="34" charset="0"/>
+                <a:ea typeface="Calibri" pitchFamily="34" charset="-122"/>
+                <a:cs typeface="Calibri" pitchFamily="34" charset="-120"/>
+              </a:rPr>
+              <a:t>SALIDA DEL FRAMEWORK</a:t>
+            </a:r>
+            <a:endParaRPr lang="en-US" sz="1000" dirty="0"/>
+          </a:p>
+        </p:txBody>
+      </p:sp>
+      <p:sp>
+        <p:nvSpPr>
+          <p:cNvPr id="3" name="Text 1"/>
+          <p:cNvSpPr/>
+          <p:nvPr/>
+        </p:nvSpPr>
+        <p:spPr>
+          <a:xfrm>
+            <a:off x="658368" y="420624"/>
+            <a:ext cx="8686800" cy="1097280"/>
+          </a:xfrm>
+          <a:prstGeom prst="rect">
+            <a:avLst/>
+          </a:prstGeom>
+          <a:noFill/>
+          <a:ln/>
+        </p:spPr>
+        <p:txBody>
+          <a:bodyPr wrap="square" lIns="0" tIns="0" rIns="0" bIns="0" rtlCol="0" anchor="t"/>
+          <a:lstStyle/>
+          <a:p>
+            <a:pPr indent="0" marL="0">
+              <a:buNone/>
+            </a:pPr>
+            <a:r>
+              <a:rPr lang="en-US" sz="3200" b="1" dirty="0">
+                <a:solidFill>
+                  <a:srgbClr val="1A1D21"/>
+                </a:solidFill>
+                <a:latin typeface="Cambria" pitchFamily="34" charset="0"/>
+                <a:ea typeface="Cambria" pitchFamily="34" charset="-122"/>
+                <a:cs typeface="Cambria" pitchFamily="34" charset="-120"/>
+              </a:rPr>
+              <a:t>La firma que supera la capa de validación</a:t>
+            </a:r>
+            <a:endParaRPr lang="en-US" sz="3200" dirty="0"/>
+          </a:p>
+        </p:txBody>
+      </p:sp>
+      <p:pic>
+        <p:nvPicPr>
+          <p:cNvPr id="4" name="Image 0" descr="/Users/danieltapiadiez/Desktop/UAX/TFM/figuras_auditoria/fig_panel_minimo.png">    </p:cNvPr>
+          <p:cNvPicPr>
+            <a:picLocks noChangeAspect="1"/>
+          </p:cNvPicPr>
+          <p:nvPr/>
+        </p:nvPicPr>
+        <p:blipFill>
+          <a:blip r:embed="rId1"/>
+          <a:stretch>
+            <a:fillRect/>
+          </a:stretch>
+        </p:blipFill>
+        <p:spPr>
+          <a:xfrm>
+            <a:off x="6272784" y="1810512"/>
+            <a:ext cx="5230368" cy="2860358"/>
+          </a:xfrm>
+          <a:prstGeom prst="rect">
+            <a:avLst/>
+          </a:prstGeom>
+        </p:spPr>
+      </p:pic>
+      <p:sp>
+        <p:nvSpPr>
+          <p:cNvPr id="5" name="Text 2"/>
+          <p:cNvSpPr/>
+          <p:nvPr/>
+        </p:nvSpPr>
+        <p:spPr>
+          <a:xfrm>
+            <a:off x="658368" y="1828800"/>
+            <a:ext cx="1572768" cy="640080"/>
+          </a:xfrm>
+          <a:prstGeom prst="rect">
+            <a:avLst/>
+          </a:prstGeom>
+          <a:noFill/>
+          <a:ln/>
+        </p:spPr>
+        <p:txBody>
+          <a:bodyPr wrap="square" lIns="0" tIns="0" rIns="0" bIns="0" rtlCol="0" anchor="t"/>
+          <a:lstStyle/>
+          <a:p>
+            <a:pPr indent="0" marL="0">
+              <a:buNone/>
+            </a:pPr>
+            <a:r>
+              <a:rPr lang="en-US" sz="3400" b="1" dirty="0">
+                <a:solidFill>
+                  <a:srgbClr val="2A78D6"/>
+                </a:solidFill>
+                <a:latin typeface="Cambria" pitchFamily="34" charset="0"/>
+                <a:ea typeface="Cambria" pitchFamily="34" charset="-122"/>
+                <a:cs typeface="Cambria" pitchFamily="34" charset="-120"/>
+              </a:rPr>
+              <a:t>1174</a:t>
+            </a:r>
+            <a:endParaRPr lang="en-US" sz="3400" dirty="0"/>
+          </a:p>
+        </p:txBody>
+      </p:sp>
+      <p:sp>
+        <p:nvSpPr>
+          <p:cNvPr id="6" name="Text 3"/>
+          <p:cNvSpPr/>
+          <p:nvPr/>
+        </p:nvSpPr>
+        <p:spPr>
+          <a:xfrm>
+            <a:off x="2359152" y="1883664"/>
+            <a:ext cx="3840480" cy="1005840"/>
+          </a:xfrm>
+          <a:prstGeom prst="rect">
+            <a:avLst/>
+          </a:prstGeom>
+          <a:noFill/>
+          <a:ln/>
+        </p:spPr>
+        <p:txBody>
+          <a:bodyPr wrap="square" lIns="0" tIns="0" rIns="0" bIns="0" rtlCol="0" anchor="t"/>
+          <a:lstStyle/>
+          <a:p>
+            <a:pPr indent="0" marL="0">
+              <a:lnSpc>
+                <a:spcPct val="124000"/>
+              </a:lnSpc>
+              <a:buNone/>
+            </a:pPr>
+            <a:r>
+              <a:rPr lang="en-US" sz="1150" dirty="0">
+                <a:solidFill>
+                  <a:srgbClr val="52514E"/>
+                </a:solidFill>
+                <a:latin typeface="Calibri" pitchFamily="34" charset="0"/>
+                <a:ea typeface="Calibri" pitchFamily="34" charset="-122"/>
+                <a:cs typeface="Calibri" pitchFamily="34" charset="-120"/>
+              </a:rPr>
+              <a:t>genes validados de 22 880 evaluados (5,1 %): efecto grande y dirección concordante en las tres cohortes por separado</a:t>
+            </a:r>
+            <a:endParaRPr lang="en-US" sz="1150" dirty="0"/>
+          </a:p>
+        </p:txBody>
+      </p:sp>
+      <p:sp>
+        <p:nvSpPr>
+          <p:cNvPr id="7" name="Text 4"/>
+          <p:cNvSpPr/>
+          <p:nvPr/>
+        </p:nvSpPr>
+        <p:spPr>
+          <a:xfrm>
+            <a:off x="658368" y="3035808"/>
+            <a:ext cx="1572768" cy="640080"/>
+          </a:xfrm>
+          <a:prstGeom prst="rect">
+            <a:avLst/>
+          </a:prstGeom>
+          <a:noFill/>
+          <a:ln/>
+        </p:spPr>
+        <p:txBody>
+          <a:bodyPr wrap="square" lIns="0" tIns="0" rIns="0" bIns="0" rtlCol="0" anchor="t"/>
+          <a:lstStyle/>
+          <a:p>
+            <a:pPr indent="0" marL="0">
+              <a:buNone/>
+            </a:pPr>
+            <a:r>
+              <a:rPr lang="en-US" sz="3400" b="1" dirty="0">
+                <a:solidFill>
+                  <a:srgbClr val="1A1D21"/>
+                </a:solidFill>
+                <a:latin typeface="Cambria" pitchFamily="34" charset="0"/>
+                <a:ea typeface="Cambria" pitchFamily="34" charset="-122"/>
+                <a:cs typeface="Cambria" pitchFamily="34" charset="-120"/>
+              </a:rPr>
+              <a:t>20</a:t>
+            </a:r>
+            <a:endParaRPr lang="en-US" sz="3400" dirty="0"/>
+          </a:p>
+        </p:txBody>
+      </p:sp>
+      <p:sp>
+        <p:nvSpPr>
+          <p:cNvPr id="8" name="Text 5"/>
+          <p:cNvSpPr/>
+          <p:nvPr/>
+        </p:nvSpPr>
+        <p:spPr>
+          <a:xfrm>
+            <a:off x="2359152" y="3090672"/>
+            <a:ext cx="3840480" cy="1005840"/>
+          </a:xfrm>
+          <a:prstGeom prst="rect">
+            <a:avLst/>
+          </a:prstGeom>
+          <a:noFill/>
+          <a:ln/>
+        </p:spPr>
+        <p:txBody>
+          <a:bodyPr wrap="square" lIns="0" tIns="0" rIns="0" bIns="0" rtlCol="0" anchor="t"/>
+          <a:lstStyle/>
+          <a:p>
+            <a:pPr indent="0" marL="0">
+              <a:lnSpc>
+                <a:spcPct val="124000"/>
+              </a:lnSpc>
+              <a:buNone/>
+            </a:pPr>
+            <a:r>
+              <a:rPr lang="en-US" sz="1150" dirty="0">
+                <a:solidFill>
+                  <a:srgbClr val="52514E"/>
+                </a:solidFill>
+                <a:latin typeface="Calibri" pitchFamily="34" charset="0"/>
+                <a:ea typeface="Calibri" pitchFamily="34" charset="-122"/>
+                <a:cs typeface="Calibri" pitchFamily="34" charset="-120"/>
+              </a:rPr>
+              <a:t>genes bastan para conservar el rendimiento: AUC 0,966 en validación externa</a:t>
+            </a:r>
+            <a:endParaRPr lang="en-US" sz="1150" dirty="0"/>
+          </a:p>
+        </p:txBody>
+      </p:sp>
+      <p:sp>
+        <p:nvSpPr>
+          <p:cNvPr id="9" name="Text 6"/>
+          <p:cNvSpPr/>
+          <p:nvPr/>
+        </p:nvSpPr>
+        <p:spPr>
+          <a:xfrm>
+            <a:off x="658368" y="4242816"/>
+            <a:ext cx="1572768" cy="640080"/>
+          </a:xfrm>
+          <a:prstGeom prst="rect">
+            <a:avLst/>
+          </a:prstGeom>
+          <a:noFill/>
+          <a:ln/>
+        </p:spPr>
+        <p:txBody>
+          <a:bodyPr wrap="square" lIns="0" tIns="0" rIns="0" bIns="0" rtlCol="0" anchor="t"/>
+          <a:lstStyle/>
+          <a:p>
+            <a:pPr indent="0" marL="0">
+              <a:buNone/>
+            </a:pPr>
+            <a:r>
+              <a:rPr lang="en-US" sz="3400" b="1" dirty="0">
+                <a:solidFill>
+                  <a:srgbClr val="2A78D6"/>
+                </a:solidFill>
+                <a:latin typeface="Cambria" pitchFamily="34" charset="0"/>
+                <a:ea typeface="Cambria" pitchFamily="34" charset="-122"/>
+                <a:cs typeface="Cambria" pitchFamily="34" charset="-120"/>
+              </a:rPr>
+              <a:t>18 / 20</a:t>
+            </a:r>
+            <a:endParaRPr lang="en-US" sz="3400" dirty="0"/>
+          </a:p>
+        </p:txBody>
+      </p:sp>
+      <p:sp>
+        <p:nvSpPr>
+          <p:cNvPr id="10" name="Text 7"/>
+          <p:cNvSpPr/>
+          <p:nvPr/>
+        </p:nvSpPr>
+        <p:spPr>
+          <a:xfrm>
+            <a:off x="2359152" y="4297680"/>
+            <a:ext cx="3840480" cy="1005840"/>
+          </a:xfrm>
+          <a:prstGeom prst="rect">
+            <a:avLst/>
+          </a:prstGeom>
+          <a:noFill/>
+          <a:ln/>
+        </p:spPr>
+        <p:txBody>
+          <a:bodyPr wrap="square" lIns="0" tIns="0" rIns="0" bIns="0" rtlCol="0" anchor="t"/>
+          <a:lstStyle/>
+          <a:p>
+            <a:pPr indent="0" marL="0">
+              <a:lnSpc>
+                <a:spcPct val="124000"/>
+              </a:lnSpc>
+              <a:buNone/>
+            </a:pPr>
+            <a:r>
+              <a:rPr lang="en-US" sz="1150" dirty="0">
+                <a:solidFill>
+                  <a:srgbClr val="52514E"/>
+                </a:solidFill>
+                <a:latin typeface="Calibri" pitchFamily="34" charset="0"/>
+                <a:ea typeface="Calibri" pitchFamily="34" charset="-122"/>
+                <a:cs typeface="Calibri" pitchFamily="34" charset="-120"/>
+              </a:rPr>
+              <a:t>marcadores de inmunohistoquímica clínica recuperados sin haber participado en la selección</a:t>
+            </a:r>
+            <a:endParaRPr lang="en-US" sz="1150" dirty="0"/>
+          </a:p>
+        </p:txBody>
+      </p:sp>
+      <p:sp>
+        <p:nvSpPr>
+          <p:cNvPr id="11" name="Shape 8"/>
+          <p:cNvSpPr/>
+          <p:nvPr/>
+        </p:nvSpPr>
+        <p:spPr>
+          <a:xfrm>
+            <a:off x="658368" y="5468112"/>
+            <a:ext cx="5431536" cy="841248"/>
+          </a:xfrm>
+          <a:prstGeom prst="roundRect">
+            <a:avLst>
+              <a:gd name="adj" fmla="val 6522"/>
+            </a:avLst>
+          </a:prstGeom>
+          <a:solidFill>
+            <a:srgbClr val="1A1D21"/>
+          </a:solidFill>
+          <a:ln w="7620">
+            <a:solidFill>
+              <a:srgbClr val="E4E3DE"/>
+            </a:solidFill>
+            <a:prstDash val="solid"/>
+          </a:ln>
+          <a:effectLst>
+            <a:outerShdw sx="100000" sy="100000" kx="0" ky="0" algn="bl" rotWithShape="0" blurRad="88900" dist="17780" dir="5400000">
+              <a:srgbClr val="B8B7B2">
+                <a:alpha val="20000"/>
+              </a:srgbClr>
+            </a:outerShdw>
+          </a:effectLst>
+        </p:spPr>
+      </p:sp>
+      <p:sp>
+        <p:nvSpPr>
+          <p:cNvPr id="12" name="Text 9"/>
+          <p:cNvSpPr/>
+          <p:nvPr/>
+        </p:nvSpPr>
+        <p:spPr>
+          <a:xfrm>
+            <a:off x="950976" y="5596128"/>
+            <a:ext cx="4846320" cy="585216"/>
+          </a:xfrm>
+          <a:prstGeom prst="rect">
+            <a:avLst/>
+          </a:prstGeom>
+          <a:noFill/>
+          <a:ln/>
+        </p:spPr>
+        <p:txBody>
+          <a:bodyPr wrap="square" lIns="0" tIns="0" rIns="0" bIns="0" rtlCol="0" anchor="ctr"/>
+          <a:lstStyle/>
+          <a:p>
+            <a:pPr indent="0" marL="0">
+              <a:lnSpc>
+                <a:spcPct val="120000"/>
+              </a:lnSpc>
+              <a:buNone/>
+            </a:pPr>
+            <a:r>
+              <a:rPr lang="en-US" sz="1050" dirty="0">
+                <a:solidFill>
+                  <a:srgbClr val="898781"/>
+                </a:solidFill>
+                <a:latin typeface="Calibri" pitchFamily="34" charset="0"/>
+                <a:ea typeface="Calibri" pitchFamily="34" charset="-122"/>
+                <a:cs typeface="Calibri" pitchFamily="34" charset="-120"/>
+              </a:rPr>
+              <a:t>Panel mínimo:  </a:t>
+            </a:r>
+            <a:pPr indent="0" marL="0">
+              <a:lnSpc>
+                <a:spcPct val="120000"/>
+              </a:lnSpc>
+              <a:buNone/>
+            </a:pPr>
+            <a:r>
+              <a:rPr lang="en-US" sz="1050" b="1" dirty="0">
+                <a:solidFill>
+                  <a:srgbClr val="FFFFFF"/>
+                </a:solidFill>
+                <a:latin typeface="Calibri" pitchFamily="34" charset="0"/>
+                <a:ea typeface="Calibri" pitchFamily="34" charset="-122"/>
+                <a:cs typeface="Calibri" pitchFamily="34" charset="-120"/>
+              </a:rPr>
+              <a:t>DSG3 · KRT5 · CALML3 · KRT6B · PKP1 · FAT2 · DAPL1 · TRIM29 · CLCA2 · DSC3</a:t>
+            </a:r>
+            <a:pPr indent="0" marL="0">
+              <a:lnSpc>
+                <a:spcPct val="120000"/>
+              </a:lnSpc>
+              <a:buNone/>
+            </a:pPr>
+            <a:r>
+              <a:rPr lang="en-US" sz="1050" dirty="0">
+                <a:solidFill>
+                  <a:srgbClr val="898781"/>
+                </a:solidFill>
+                <a:latin typeface="Calibri" pitchFamily="34" charset="0"/>
+                <a:ea typeface="Calibri" pitchFamily="34" charset="-122"/>
+                <a:cs typeface="Calibri" pitchFamily="34" charset="-120"/>
+              </a:rPr>
+              <a:t> …</a:t>
+            </a:r>
+            <a:endParaRPr lang="en-US" sz="1050" dirty="0"/>
+          </a:p>
+        </p:txBody>
+      </p:sp>
+      <p:sp>
+        <p:nvSpPr>
+          <p:cNvPr id="13" name="Text 10"/>
+          <p:cNvSpPr/>
+          <p:nvPr/>
+        </p:nvSpPr>
+        <p:spPr>
+          <a:xfrm>
+            <a:off x="658368" y="6382512"/>
+            <a:ext cx="10844784" cy="256032"/>
+          </a:xfrm>
+          <a:prstGeom prst="rect">
+            <a:avLst/>
+          </a:prstGeom>
+          <a:noFill/>
+          <a:ln/>
+        </p:spPr>
+        <p:txBody>
+          <a:bodyPr wrap="square" lIns="0" tIns="0" rIns="0" bIns="0" rtlCol="0" anchor="ctr"/>
+          <a:lstStyle/>
+          <a:p>
+            <a:pPr indent="0" marL="0">
+              <a:buNone/>
+            </a:pPr>
+            <a:r>
+              <a:rPr lang="en-US" sz="900" i="1" dirty="0">
+                <a:solidFill>
+                  <a:srgbClr val="898781"/>
+                </a:solidFill>
+                <a:latin typeface="Calibri" pitchFamily="34" charset="0"/>
+                <a:ea typeface="Calibri" pitchFamily="34" charset="-122"/>
+                <a:cs typeface="Calibri" pitchFamily="34" charset="-120"/>
+              </a:rPr>
+              <a:t>La misma capa de validación retiene 151 genes en la tarea tumor frente a sano (1,14 % de los evaluados): discrimina entre tareas sin cambiar de criterio.</a:t>
+            </a:r>
+            <a:endParaRPr lang="en-US" sz="900" dirty="0"/>
+          </a:p>
+        </p:txBody>
+      </p:sp>
+    </p:spTree>
+  </p:cSld>
+  <p:clrMapOvr>
+    <a:masterClrMapping/>
+  </p:clrMapOvr>
+</p:sld>
+</file>
+
+<file path=ppt/slides/slide15.xml><?xml version="1.0" encoding="utf-8"?>
+<p:sld xmlns:a="http://schemas.openxmlformats.org/drawingml/2006/main" xmlns:r="http://schemas.openxmlformats.org/officeDocument/2006/relationships" xmlns:p="http://schemas.openxmlformats.org/presentationml/2006/main">
+  <p:cSld name="Slide 15">
+    <p:bg>
+      <p:bgPr>
+        <a:solidFill>
           <a:srgbClr val="1A1D21"/>
         </a:solidFill>
       </p:bgPr>
@@ -6775,432 +7410,6 @@
               <a:t>Tasa de éxito por cohorte, y exclusión explícita cuando es baja.</a:t>
             </a:r>
             <a:endParaRPr lang="en-US" sz="1100" dirty="0"/>
-          </a:p>
-        </p:txBody>
-      </p:sp>
-    </p:spTree>
-  </p:cSld>
-  <p:clrMapOvr>
-    <a:masterClrMapping/>
-  </p:clrMapOvr>
-</p:sld>
-</file>
-
-<file path=ppt/slides/slide15.xml><?xml version="1.0" encoding="utf-8"?>
-<p:sld xmlns:a="http://schemas.openxmlformats.org/drawingml/2006/main" xmlns:r="http://schemas.openxmlformats.org/officeDocument/2006/relationships" xmlns:p="http://schemas.openxmlformats.org/presentationml/2006/main">
-  <p:cSld name="Slide 15">
-    <p:bg>
-      <p:bgPr>
-        <a:solidFill>
-          <a:srgbClr val="FCFCFB"/>
-        </a:solidFill>
-      </p:bgPr>
-    </p:bg>
-    <p:spTree>
-      <p:nvGrpSpPr>
-        <p:cNvPr id="1" name=""/>
-        <p:cNvGrpSpPr/>
-        <p:nvPr/>
-      </p:nvGrpSpPr>
-      <p:grpSpPr>
-        <a:xfrm>
-          <a:off x="0" y="0"/>
-          <a:ext cx="0" cy="0"/>
-          <a:chOff x="0" y="0"/>
-          <a:chExt cx="0" cy="0"/>
-        </a:xfrm>
-      </p:grpSpPr>
-      <p:sp>
-        <p:nvSpPr>
-          <p:cNvPr id="2" name="Text 0"/>
-          <p:cNvSpPr/>
-          <p:nvPr/>
-        </p:nvSpPr>
-        <p:spPr>
-          <a:xfrm>
-            <a:off x="658368" y="182880"/>
-            <a:ext cx="10844784" cy="237744"/>
-          </a:xfrm>
-          <a:prstGeom prst="rect">
-            <a:avLst/>
-          </a:prstGeom>
-          <a:noFill/>
-          <a:ln/>
-        </p:spPr>
-        <p:txBody>
-          <a:bodyPr wrap="square" lIns="0" tIns="0" rIns="0" bIns="0" rtlCol="0" anchor="ctr"/>
-          <a:lstStyle/>
-          <a:p>
-            <a:pPr indent="0" marL="0">
-              <a:buNone/>
-            </a:pPr>
-            <a:r>
-              <a:rPr lang="en-US" sz="1000" b="1" spc="240" kern="0" dirty="0">
-                <a:solidFill>
-                  <a:srgbClr val="898781"/>
-                </a:solidFill>
-                <a:latin typeface="Calibri" pitchFamily="34" charset="0"/>
-                <a:ea typeface="Calibri" pitchFamily="34" charset="-122"/>
-                <a:cs typeface="Calibri" pitchFamily="34" charset="-120"/>
-              </a:rPr>
-              <a:t>CONCLUSIONES</a:t>
-            </a:r>
-            <a:endParaRPr lang="en-US" sz="1000" dirty="0"/>
-          </a:p>
-        </p:txBody>
-      </p:sp>
-      <p:sp>
-        <p:nvSpPr>
-          <p:cNvPr id="3" name="Text 1"/>
-          <p:cNvSpPr/>
-          <p:nvPr/>
-        </p:nvSpPr>
-        <p:spPr>
-          <a:xfrm>
-            <a:off x="658368" y="420624"/>
-            <a:ext cx="10844784" cy="1097280"/>
-          </a:xfrm>
-          <a:prstGeom prst="rect">
-            <a:avLst/>
-          </a:prstGeom>
-          <a:noFill/>
-          <a:ln/>
-        </p:spPr>
-        <p:txBody>
-          <a:bodyPr wrap="square" lIns="0" tIns="0" rIns="0" bIns="0" rtlCol="0" anchor="t"/>
-          <a:lstStyle/>
-          <a:p>
-            <a:pPr indent="0" marL="0">
-              <a:buNone/>
-            </a:pPr>
-            <a:r>
-              <a:rPr lang="en-US" sz="3200" b="1" dirty="0">
-                <a:solidFill>
-                  <a:srgbClr val="1A1D21"/>
-                </a:solidFill>
-                <a:latin typeface="Cambria" pitchFamily="34" charset="0"/>
-                <a:ea typeface="Cambria" pitchFamily="34" charset="-122"/>
-                <a:cs typeface="Cambria" pitchFamily="34" charset="-120"/>
-              </a:rPr>
-              <a:t>Qué sostienen los datos</a:t>
-            </a:r>
-            <a:endParaRPr lang="en-US" sz="3200" dirty="0"/>
-          </a:p>
-        </p:txBody>
-      </p:sp>
-      <p:sp>
-        <p:nvSpPr>
-          <p:cNvPr id="4" name="Text 2"/>
-          <p:cNvSpPr/>
-          <p:nvPr/>
-        </p:nvSpPr>
-        <p:spPr>
-          <a:xfrm>
-            <a:off x="658368" y="1737360"/>
-            <a:ext cx="2286000" cy="658368"/>
-          </a:xfrm>
-          <a:prstGeom prst="rect">
-            <a:avLst/>
-          </a:prstGeom>
-          <a:noFill/>
-          <a:ln/>
-        </p:spPr>
-        <p:txBody>
-          <a:bodyPr wrap="square" lIns="0" tIns="0" rIns="0" bIns="0" rtlCol="0" anchor="t"/>
-          <a:lstStyle/>
-          <a:p>
-            <a:pPr indent="0" marL="0">
-              <a:buNone/>
-            </a:pPr>
-            <a:r>
-              <a:rPr lang="en-US" sz="3600" b="1" dirty="0">
-                <a:solidFill>
-                  <a:srgbClr val="2A78D6"/>
-                </a:solidFill>
-                <a:latin typeface="Cambria" pitchFamily="34" charset="0"/>
-                <a:ea typeface="Cambria" pitchFamily="34" charset="-122"/>
-                <a:cs typeface="Cambria" pitchFamily="34" charset="-120"/>
-              </a:rPr>
-              <a:t>0,772</a:t>
-            </a:r>
-            <a:endParaRPr lang="en-US" sz="3600" dirty="0"/>
-          </a:p>
-        </p:txBody>
-      </p:sp>
-      <p:sp>
-        <p:nvSpPr>
-          <p:cNvPr id="5" name="Text 3"/>
-          <p:cNvSpPr/>
-          <p:nvPr/>
-        </p:nvSpPr>
-        <p:spPr>
-          <a:xfrm>
-            <a:off x="3127248" y="1810512"/>
-            <a:ext cx="8412480" cy="822960"/>
-          </a:xfrm>
-          <a:prstGeom prst="rect">
-            <a:avLst/>
-          </a:prstGeom>
-          <a:noFill/>
-          <a:ln/>
-        </p:spPr>
-        <p:txBody>
-          <a:bodyPr wrap="square" lIns="0" tIns="0" rIns="0" bIns="0" rtlCol="0" anchor="t"/>
-          <a:lstStyle/>
-          <a:p>
-            <a:pPr indent="0" marL="0">
-              <a:lnSpc>
-                <a:spcPct val="124000"/>
-              </a:lnSpc>
-              <a:buNone/>
-            </a:pPr>
-            <a:r>
-              <a:rPr lang="en-US" sz="1350" dirty="0">
-                <a:solidFill>
-                  <a:srgbClr val="52514E"/>
-                </a:solidFill>
-                <a:latin typeface="Calibri" pitchFamily="34" charset="0"/>
-                <a:ea typeface="Calibri" pitchFamily="34" charset="-122"/>
-                <a:cs typeface="Calibri" pitchFamily="34" charset="-120"/>
-              </a:rPr>
-              <a:t>balanced accuracy real sobre cohortes evaluables, frente al valor reportado sobre las once con las monoclase dentro</a:t>
-            </a:r>
-            <a:endParaRPr lang="en-US" sz="1350" dirty="0"/>
-          </a:p>
-        </p:txBody>
-      </p:sp>
-      <p:sp>
-        <p:nvSpPr>
-          <p:cNvPr id="6" name="Text 4"/>
-          <p:cNvSpPr/>
-          <p:nvPr/>
-        </p:nvSpPr>
-        <p:spPr>
-          <a:xfrm>
-            <a:off x="658368" y="3017520"/>
-            <a:ext cx="2286000" cy="658368"/>
-          </a:xfrm>
-          <a:prstGeom prst="rect">
-            <a:avLst/>
-          </a:prstGeom>
-          <a:noFill/>
-          <a:ln/>
-        </p:spPr>
-        <p:txBody>
-          <a:bodyPr wrap="square" lIns="0" tIns="0" rIns="0" bIns="0" rtlCol="0" anchor="t"/>
-          <a:lstStyle/>
-          <a:p>
-            <a:pPr indent="0" marL="0">
-              <a:buNone/>
-            </a:pPr>
-            <a:r>
-              <a:rPr lang="en-US" sz="3600" b="1" dirty="0">
-                <a:solidFill>
-                  <a:srgbClr val="D03B3B"/>
-                </a:solidFill>
-                <a:latin typeface="Cambria" pitchFamily="34" charset="0"/>
-                <a:ea typeface="Cambria" pitchFamily="34" charset="-122"/>
-                <a:cs typeface="Cambria" pitchFamily="34" charset="-120"/>
-              </a:rPr>
-              <a:t>0 de 7</a:t>
-            </a:r>
-            <a:endParaRPr lang="en-US" sz="3600" dirty="0"/>
-          </a:p>
-        </p:txBody>
-      </p:sp>
-      <p:sp>
-        <p:nvSpPr>
-          <p:cNvPr id="7" name="Text 5"/>
-          <p:cNvSpPr/>
-          <p:nvPr/>
-        </p:nvSpPr>
-        <p:spPr>
-          <a:xfrm>
-            <a:off x="3127248" y="3090672"/>
-            <a:ext cx="8412480" cy="822960"/>
-          </a:xfrm>
-          <a:prstGeom prst="rect">
-            <a:avLst/>
-          </a:prstGeom>
-          <a:noFill/>
-          <a:ln/>
-        </p:spPr>
-        <p:txBody>
-          <a:bodyPr wrap="square" lIns="0" tIns="0" rIns="0" bIns="0" rtlCol="0" anchor="t"/>
-          <a:lstStyle/>
-          <a:p>
-            <a:pPr indent="0" marL="0">
-              <a:lnSpc>
-                <a:spcPct val="124000"/>
-              </a:lnSpc>
-              <a:buNone/>
-            </a:pPr>
-            <a:r>
-              <a:rPr lang="en-US" sz="1350" dirty="0">
-                <a:solidFill>
-                  <a:srgbClr val="52514E"/>
-                </a:solidFill>
-                <a:latin typeface="Calibri" pitchFamily="34" charset="0"/>
-                <a:ea typeface="Calibri" pitchFamily="34" charset="-122"/>
-                <a:cs typeface="Calibri" pitchFamily="34" charset="-120"/>
-              </a:rPr>
-              <a:t>genes de la firma previa que replican al ajustar modelos en cohortes disjuntas</a:t>
-            </a:r>
-            <a:endParaRPr lang="en-US" sz="1350" dirty="0"/>
-          </a:p>
-        </p:txBody>
-      </p:sp>
-      <p:sp>
-        <p:nvSpPr>
-          <p:cNvPr id="8" name="Text 6"/>
-          <p:cNvSpPr/>
-          <p:nvPr/>
-        </p:nvSpPr>
-        <p:spPr>
-          <a:xfrm>
-            <a:off x="658368" y="4297680"/>
-            <a:ext cx="2286000" cy="658368"/>
-          </a:xfrm>
-          <a:prstGeom prst="rect">
-            <a:avLst/>
-          </a:prstGeom>
-          <a:noFill/>
-          <a:ln/>
-        </p:spPr>
-        <p:txBody>
-          <a:bodyPr wrap="square" lIns="0" tIns="0" rIns="0" bIns="0" rtlCol="0" anchor="t"/>
-          <a:lstStyle/>
-          <a:p>
-            <a:pPr indent="0" marL="0">
-              <a:buNone/>
-            </a:pPr>
-            <a:r>
-              <a:rPr lang="en-US" sz="3600" b="1" dirty="0">
-                <a:solidFill>
-                  <a:srgbClr val="2A78D6"/>
-                </a:solidFill>
-                <a:latin typeface="Cambria" pitchFamily="34" charset="0"/>
-                <a:ea typeface="Cambria" pitchFamily="34" charset="-122"/>
-                <a:cs typeface="Cambria" pitchFamily="34" charset="-120"/>
-              </a:rPr>
-              <a:t>0,968</a:t>
-            </a:r>
-            <a:endParaRPr lang="en-US" sz="3600" dirty="0"/>
-          </a:p>
-        </p:txBody>
-      </p:sp>
-      <p:sp>
-        <p:nvSpPr>
-          <p:cNvPr id="9" name="Text 7"/>
-          <p:cNvSpPr/>
-          <p:nvPr/>
-        </p:nvSpPr>
-        <p:spPr>
-          <a:xfrm>
-            <a:off x="3127248" y="4370832"/>
-            <a:ext cx="8412480" cy="822960"/>
-          </a:xfrm>
-          <a:prstGeom prst="rect">
-            <a:avLst/>
-          </a:prstGeom>
-          <a:noFill/>
-          <a:ln/>
-        </p:spPr>
-        <p:txBody>
-          <a:bodyPr wrap="square" lIns="0" tIns="0" rIns="0" bIns="0" rtlCol="0" anchor="t"/>
-          <a:lstStyle/>
-          <a:p>
-            <a:pPr indent="0" marL="0">
-              <a:lnSpc>
-                <a:spcPct val="124000"/>
-              </a:lnSpc>
-              <a:buNone/>
-            </a:pPr>
-            <a:r>
-              <a:rPr lang="en-US" sz="1350" dirty="0">
-                <a:solidFill>
-                  <a:srgbClr val="52514E"/>
-                </a:solidFill>
-                <a:latin typeface="Calibri" pitchFamily="34" charset="0"/>
-                <a:ea typeface="Calibri" pitchFamily="34" charset="-122"/>
-                <a:cs typeface="Calibri" pitchFamily="34" charset="-120"/>
-              </a:rPr>
-              <a:t>AUC en subtipo histológico: el marco recupera biología reproducible cuando existe</a:t>
-            </a:r>
-            <a:endParaRPr lang="en-US" sz="1350" dirty="0"/>
-          </a:p>
-        </p:txBody>
-      </p:sp>
-      <p:sp>
-        <p:nvSpPr>
-          <p:cNvPr id="10" name="Shape 8"/>
-          <p:cNvSpPr/>
-          <p:nvPr/>
-        </p:nvSpPr>
-        <p:spPr>
-          <a:xfrm>
-            <a:off x="658368" y="5541264"/>
-            <a:ext cx="10844784" cy="841248"/>
-          </a:xfrm>
-          <a:prstGeom prst="roundRect">
-            <a:avLst>
-              <a:gd name="adj" fmla="val 6522"/>
-            </a:avLst>
-          </a:prstGeom>
-          <a:solidFill>
-            <a:srgbClr val="1A1D21"/>
-          </a:solidFill>
-          <a:ln w="7620">
-            <a:solidFill>
-              <a:srgbClr val="E4E3DE"/>
-            </a:solidFill>
-            <a:prstDash val="solid"/>
-          </a:ln>
-          <a:effectLst>
-            <a:outerShdw sx="100000" sy="100000" kx="0" ky="0" algn="bl" rotWithShape="0" blurRad="88900" dist="17780" dir="5400000">
-              <a:srgbClr val="B8B7B2">
-                <a:alpha val="20000"/>
-              </a:srgbClr>
-            </a:outerShdw>
-          </a:effectLst>
-        </p:spPr>
-      </p:sp>
-      <p:sp>
-        <p:nvSpPr>
-          <p:cNvPr id="11" name="Text 9"/>
-          <p:cNvSpPr/>
-          <p:nvPr/>
-        </p:nvSpPr>
-        <p:spPr>
-          <a:xfrm>
-            <a:off x="1024128" y="5669280"/>
-            <a:ext cx="10149840" cy="585216"/>
-          </a:xfrm>
-          <a:prstGeom prst="rect">
-            <a:avLst/>
-          </a:prstGeom>
-          <a:noFill/>
-          <a:ln/>
-        </p:spPr>
-        <p:txBody>
-          <a:bodyPr wrap="square" lIns="0" tIns="0" rIns="0" bIns="0" rtlCol="0" anchor="ctr"/>
-          <a:lstStyle/>
-          <a:p>
-            <a:pPr indent="0" marL="0">
-              <a:buNone/>
-            </a:pPr>
-            <a:r>
-              <a:rPr lang="en-US" sz="1600" i="1" dirty="0">
-                <a:solidFill>
-                  <a:srgbClr val="FFFFFF"/>
-                </a:solidFill>
-                <a:latin typeface="Cambria" pitchFamily="34" charset="0"/>
-                <a:ea typeface="Cambria" pitchFamily="34" charset="-122"/>
-                <a:cs typeface="Cambria" pitchFamily="34" charset="-120"/>
-              </a:rPr>
-              <a:t>El framework es válido. El hallazgo original no lo era —y aquí está por qué, medido.</a:t>
-            </a:r>
-            <a:endParaRPr lang="en-US" sz="1600" dirty="0"/>
           </a:p>
         </p:txBody>
       </p:sp>
@@ -7269,7 +7478,7 @@
                 <a:ea typeface="Calibri" pitchFamily="34" charset="-122"/>
                 <a:cs typeface="Calibri" pitchFamily="34" charset="-120"/>
               </a:rPr>
-              <a:t>LÍNEAS FUTURAS</a:t>
+              <a:t>CONCLUSIONES</a:t>
             </a:r>
             <a:endParaRPr lang="en-US" sz="1000" dirty="0"/>
           </a:p>
@@ -7308,7 +7517,7 @@
                 <a:ea typeface="Cambria" pitchFamily="34" charset="-122"/>
                 <a:cs typeface="Cambria" pitchFamily="34" charset="-120"/>
               </a:rPr>
-              <a:t>Preguntas que estos mismos datos ya permiten</a:t>
+              <a:t>Qué sostienen los datos</a:t>
             </a:r>
             <a:endParaRPr lang="en-US" sz="3200" dirty="0"/>
           </a:p>
@@ -7316,22 +7525,265 @@
       </p:sp>
       <p:sp>
         <p:nvSpPr>
-          <p:cNvPr id="4" name="Shape 2"/>
-          <p:cNvSpPr/>
-          <p:nvPr/>
-        </p:nvSpPr>
-        <p:spPr>
-          <a:xfrm>
-            <a:off x="658368" y="1783080"/>
-            <a:ext cx="3456432" cy="4114800"/>
+          <p:cNvPr id="4" name="Text 2"/>
+          <p:cNvSpPr/>
+          <p:nvPr/>
+        </p:nvSpPr>
+        <p:spPr>
+          <a:xfrm>
+            <a:off x="658368" y="1737360"/>
+            <a:ext cx="2286000" cy="658368"/>
+          </a:xfrm>
+          <a:prstGeom prst="rect">
+            <a:avLst/>
+          </a:prstGeom>
+          <a:noFill/>
+          <a:ln/>
+        </p:spPr>
+        <p:txBody>
+          <a:bodyPr wrap="square" lIns="0" tIns="0" rIns="0" bIns="0" rtlCol="0" anchor="t"/>
+          <a:lstStyle/>
+          <a:p>
+            <a:pPr indent="0" marL="0">
+              <a:buNone/>
+            </a:pPr>
+            <a:r>
+              <a:rPr lang="en-US" sz="3600" b="1" dirty="0">
+                <a:solidFill>
+                  <a:srgbClr val="2A78D6"/>
+                </a:solidFill>
+                <a:latin typeface="Cambria" pitchFamily="34" charset="0"/>
+                <a:ea typeface="Cambria" pitchFamily="34" charset="-122"/>
+                <a:cs typeface="Cambria" pitchFamily="34" charset="-120"/>
+              </a:rPr>
+              <a:t>20</a:t>
+            </a:r>
+            <a:endParaRPr lang="en-US" sz="3600" dirty="0"/>
+          </a:p>
+        </p:txBody>
+      </p:sp>
+      <p:sp>
+        <p:nvSpPr>
+          <p:cNvPr id="5" name="Text 3"/>
+          <p:cNvSpPr/>
+          <p:nvPr/>
+        </p:nvSpPr>
+        <p:spPr>
+          <a:xfrm>
+            <a:off x="3127248" y="1810512"/>
+            <a:ext cx="8412480" cy="822960"/>
+          </a:xfrm>
+          <a:prstGeom prst="rect">
+            <a:avLst/>
+          </a:prstGeom>
+          <a:noFill/>
+          <a:ln/>
+        </p:spPr>
+        <p:txBody>
+          <a:bodyPr wrap="square" lIns="0" tIns="0" rIns="0" bIns="0" rtlCol="0" anchor="t"/>
+          <a:lstStyle/>
+          <a:p>
+            <a:pPr indent="0" marL="0">
+              <a:lnSpc>
+                <a:spcPct val="124000"/>
+              </a:lnSpc>
+              <a:buNone/>
+            </a:pPr>
+            <a:r>
+              <a:rPr lang="en-US" sz="1350" dirty="0">
+                <a:solidFill>
+                  <a:srgbClr val="52514E"/>
+                </a:solidFill>
+                <a:latin typeface="Calibri" pitchFamily="34" charset="0"/>
+                <a:ea typeface="Calibri" pitchFamily="34" charset="-122"/>
+                <a:cs typeface="Calibri" pitchFamily="34" charset="-120"/>
+              </a:rPr>
+              <a:t>genes componen el panel entregado por el framework, con AUC 0,966 en validación externa y 18 de 20 marcadores de inmunohistoquímica recuperados</a:t>
+            </a:r>
+            <a:endParaRPr lang="en-US" sz="1350" dirty="0"/>
+          </a:p>
+        </p:txBody>
+      </p:sp>
+      <p:sp>
+        <p:nvSpPr>
+          <p:cNvPr id="6" name="Text 4"/>
+          <p:cNvSpPr/>
+          <p:nvPr/>
+        </p:nvSpPr>
+        <p:spPr>
+          <a:xfrm>
+            <a:off x="658368" y="3017520"/>
+            <a:ext cx="2286000" cy="658368"/>
+          </a:xfrm>
+          <a:prstGeom prst="rect">
+            <a:avLst/>
+          </a:prstGeom>
+          <a:noFill/>
+          <a:ln/>
+        </p:spPr>
+        <p:txBody>
+          <a:bodyPr wrap="square" lIns="0" tIns="0" rIns="0" bIns="0" rtlCol="0" anchor="t"/>
+          <a:lstStyle/>
+          <a:p>
+            <a:pPr indent="0" marL="0">
+              <a:buNone/>
+            </a:pPr>
+            <a:r>
+              <a:rPr lang="en-US" sz="3600" b="1" dirty="0">
+                <a:solidFill>
+                  <a:srgbClr val="D03B3B"/>
+                </a:solidFill>
+                <a:latin typeface="Cambria" pitchFamily="34" charset="0"/>
+                <a:ea typeface="Cambria" pitchFamily="34" charset="-122"/>
+                <a:cs typeface="Cambria" pitchFamily="34" charset="-120"/>
+              </a:rPr>
+              <a:t>0 de 7</a:t>
+            </a:r>
+            <a:endParaRPr lang="en-US" sz="3600" dirty="0"/>
+          </a:p>
+        </p:txBody>
+      </p:sp>
+      <p:sp>
+        <p:nvSpPr>
+          <p:cNvPr id="7" name="Text 5"/>
+          <p:cNvSpPr/>
+          <p:nvPr/>
+        </p:nvSpPr>
+        <p:spPr>
+          <a:xfrm>
+            <a:off x="3127248" y="3090672"/>
+            <a:ext cx="8412480" cy="822960"/>
+          </a:xfrm>
+          <a:prstGeom prst="rect">
+            <a:avLst/>
+          </a:prstGeom>
+          <a:noFill/>
+          <a:ln/>
+        </p:spPr>
+        <p:txBody>
+          <a:bodyPr wrap="square" lIns="0" tIns="0" rIns="0" bIns="0" rtlCol="0" anchor="t"/>
+          <a:lstStyle/>
+          <a:p>
+            <a:pPr indent="0" marL="0">
+              <a:lnSpc>
+                <a:spcPct val="124000"/>
+              </a:lnSpc>
+              <a:buNone/>
+            </a:pPr>
+            <a:r>
+              <a:rPr lang="en-US" sz="1350" dirty="0">
+                <a:solidFill>
+                  <a:srgbClr val="52514E"/>
+                </a:solidFill>
+                <a:latin typeface="Calibri" pitchFamily="34" charset="0"/>
+                <a:ea typeface="Calibri" pitchFamily="34" charset="-122"/>
+                <a:cs typeface="Calibri" pitchFamily="34" charset="-120"/>
+              </a:rPr>
+              <a:t>genes de la firma inicial que superan la capa de validación: el framework rechaza su propio primer resultado</a:t>
+            </a:r>
+            <a:endParaRPr lang="en-US" sz="1350" dirty="0"/>
+          </a:p>
+        </p:txBody>
+      </p:sp>
+      <p:sp>
+        <p:nvSpPr>
+          <p:cNvPr id="8" name="Text 6"/>
+          <p:cNvSpPr/>
+          <p:nvPr/>
+        </p:nvSpPr>
+        <p:spPr>
+          <a:xfrm>
+            <a:off x="658368" y="4297680"/>
+            <a:ext cx="2286000" cy="658368"/>
+          </a:xfrm>
+          <a:prstGeom prst="rect">
+            <a:avLst/>
+          </a:prstGeom>
+          <a:noFill/>
+          <a:ln/>
+        </p:spPr>
+        <p:txBody>
+          <a:bodyPr wrap="square" lIns="0" tIns="0" rIns="0" bIns="0" rtlCol="0" anchor="t"/>
+          <a:lstStyle/>
+          <a:p>
+            <a:pPr indent="0" marL="0">
+              <a:buNone/>
+            </a:pPr>
+            <a:r>
+              <a:rPr lang="en-US" sz="3600" b="1" dirty="0">
+                <a:solidFill>
+                  <a:srgbClr val="1A1D21"/>
+                </a:solidFill>
+                <a:latin typeface="Cambria" pitchFamily="34" charset="0"/>
+                <a:ea typeface="Cambria" pitchFamily="34" charset="-122"/>
+                <a:cs typeface="Cambria" pitchFamily="34" charset="-120"/>
+              </a:rPr>
+              <a:t>0,772</a:t>
+            </a:r>
+            <a:endParaRPr lang="en-US" sz="3600" dirty="0"/>
+          </a:p>
+        </p:txBody>
+      </p:sp>
+      <p:sp>
+        <p:nvSpPr>
+          <p:cNvPr id="9" name="Text 7"/>
+          <p:cNvSpPr/>
+          <p:nvPr/>
+        </p:nvSpPr>
+        <p:spPr>
+          <a:xfrm>
+            <a:off x="3127248" y="4370832"/>
+            <a:ext cx="8412480" cy="822960"/>
+          </a:xfrm>
+          <a:prstGeom prst="rect">
+            <a:avLst/>
+          </a:prstGeom>
+          <a:noFill/>
+          <a:ln/>
+        </p:spPr>
+        <p:txBody>
+          <a:bodyPr wrap="square" lIns="0" tIns="0" rIns="0" bIns="0" rtlCol="0" anchor="t"/>
+          <a:lstStyle/>
+          <a:p>
+            <a:pPr indent="0" marL="0">
+              <a:lnSpc>
+                <a:spcPct val="124000"/>
+              </a:lnSpc>
+              <a:buNone/>
+            </a:pPr>
+            <a:r>
+              <a:rPr lang="en-US" sz="1350" dirty="0">
+                <a:solidFill>
+                  <a:srgbClr val="52514E"/>
+                </a:solidFill>
+                <a:latin typeface="Calibri" pitchFamily="34" charset="0"/>
+                <a:ea typeface="Calibri" pitchFamily="34" charset="-122"/>
+                <a:cs typeface="Calibri" pitchFamily="34" charset="-120"/>
+              </a:rPr>
+              <a:t>balanced accuracy real en tumor frente a sano, frente al valor que se obtenía incluyendo las tres cohortes de una sola clase</a:t>
+            </a:r>
+            <a:endParaRPr lang="en-US" sz="1350" dirty="0"/>
+          </a:p>
+        </p:txBody>
+      </p:sp>
+      <p:sp>
+        <p:nvSpPr>
+          <p:cNvPr id="10" name="Shape 8"/>
+          <p:cNvSpPr/>
+          <p:nvPr/>
+        </p:nvSpPr>
+        <p:spPr>
+          <a:xfrm>
+            <a:off x="658368" y="5541264"/>
+            <a:ext cx="10844784" cy="841248"/>
           </a:xfrm>
           <a:prstGeom prst="roundRect">
             <a:avLst>
-              <a:gd name="adj" fmla="val 1587"/>
+              <a:gd name="adj" fmla="val 6522"/>
             </a:avLst>
           </a:prstGeom>
           <a:solidFill>
-            <a:srgbClr val="F1F0EC"/>
+            <a:srgbClr val="1A1D21"/>
           </a:solidFill>
           <a:ln w="7620">
             <a:solidFill>
@@ -7350,14 +7802,14 @@
       </p:sp>
       <p:sp>
         <p:nvSpPr>
-          <p:cNvPr id="5" name="Text 3"/>
-          <p:cNvSpPr/>
-          <p:nvPr/>
-        </p:nvSpPr>
-        <p:spPr>
-          <a:xfrm>
-            <a:off x="950976" y="2029968"/>
-            <a:ext cx="2871216" cy="365760"/>
+          <p:cNvPr id="11" name="Text 9"/>
+          <p:cNvSpPr/>
+          <p:nvPr/>
+        </p:nvSpPr>
+        <p:spPr>
+          <a:xfrm>
+            <a:off x="1024128" y="5669280"/>
+            <a:ext cx="10149840" cy="585216"/>
           </a:xfrm>
           <a:prstGeom prst="rect">
             <a:avLst/>
@@ -7366,461 +7818,24 @@
           <a:ln/>
         </p:spPr>
         <p:txBody>
-          <a:bodyPr wrap="square" lIns="0" tIns="0" rIns="0" bIns="0" rtlCol="0" anchor="t"/>
-          <a:lstStyle/>
-          <a:p>
-            <a:pPr indent="0" marL="0">
-              <a:buNone/>
-            </a:pPr>
-            <a:r>
-              <a:rPr lang="en-US" sz="1700" b="1" dirty="0">
-                <a:solidFill>
-                  <a:srgbClr val="1A1D21"/>
+          <a:bodyPr wrap="square" lIns="0" tIns="0" rIns="0" bIns="0" rtlCol="0" anchor="ctr"/>
+          <a:lstStyle/>
+          <a:p>
+            <a:pPr indent="0" marL="0">
+              <a:buNone/>
+            </a:pPr>
+            <a:r>
+              <a:rPr lang="en-US" sz="1600" i="1" dirty="0">
+                <a:solidFill>
+                  <a:srgbClr val="FFFFFF"/>
                 </a:solidFill>
                 <a:latin typeface="Cambria" pitchFamily="34" charset="0"/>
                 <a:ea typeface="Cambria" pitchFamily="34" charset="-122"/>
                 <a:cs typeface="Cambria" pitchFamily="34" charset="-120"/>
               </a:rPr>
-              <a:t>Pronóstico</a:t>
-            </a:r>
-            <a:endParaRPr lang="en-US" sz="1700" dirty="0"/>
-          </a:p>
-        </p:txBody>
-      </p:sp>
-      <p:sp>
-        <p:nvSpPr>
-          <p:cNvPr id="6" name="Text 4"/>
-          <p:cNvSpPr/>
-          <p:nvPr/>
-        </p:nvSpPr>
-        <p:spPr>
-          <a:xfrm>
-            <a:off x="950976" y="2523744"/>
-            <a:ext cx="2871216" cy="1920240"/>
-          </a:xfrm>
-          <a:prstGeom prst="rect">
-            <a:avLst/>
-          </a:prstGeom>
-          <a:noFill/>
-          <a:ln/>
-        </p:spPr>
-        <p:txBody>
-          <a:bodyPr wrap="square" lIns="0" tIns="0" rIns="0" bIns="0" rtlCol="0" anchor="t"/>
-          <a:lstStyle/>
-          <a:p>
-            <a:pPr indent="0" marL="0">
-              <a:lnSpc>
-                <a:spcPct val="124000"/>
-              </a:lnSpc>
-              <a:buNone/>
-            </a:pPr>
-            <a:r>
-              <a:rPr lang="en-US" sz="1150" dirty="0">
-                <a:solidFill>
-                  <a:srgbClr val="52514E"/>
-                </a:solidFill>
-                <a:latin typeface="Calibri" pitchFamily="34" charset="0"/>
-                <a:ea typeface="Calibri" pitchFamily="34" charset="-122"/>
-                <a:cs typeface="Calibri" pitchFamily="34" charset="-120"/>
-              </a:rPr>
-              <a:t>GSE30219 y GSE50081 tienen seguimiento clínico completo: 307 y 181 tumores, con 200 y 75 eventos de mortalidad. Análisis de supervivencia con validación cruzada entre cohortes.</a:t>
-            </a:r>
-            <a:endParaRPr lang="en-US" sz="1150" dirty="0"/>
-          </a:p>
-        </p:txBody>
-      </p:sp>
-      <p:sp>
-        <p:nvSpPr>
-          <p:cNvPr id="7" name="Text 5"/>
-          <p:cNvSpPr/>
-          <p:nvPr/>
-        </p:nvSpPr>
-        <p:spPr>
-          <a:xfrm>
-            <a:off x="950976" y="4626864"/>
-            <a:ext cx="2871216" cy="1042416"/>
-          </a:xfrm>
-          <a:prstGeom prst="rect">
-            <a:avLst/>
-          </a:prstGeom>
-          <a:noFill/>
-          <a:ln/>
-        </p:spPr>
-        <p:txBody>
-          <a:bodyPr wrap="square" lIns="0" tIns="0" rIns="0" bIns="0" rtlCol="0" anchor="t"/>
-          <a:lstStyle/>
-          <a:p>
-            <a:pPr indent="0" marL="0">
-              <a:lnSpc>
-                <a:spcPct val="120000"/>
-              </a:lnSpc>
-              <a:buNone/>
-            </a:pPr>
-            <a:r>
-              <a:rPr lang="en-US" sz="1050" i="1" dirty="0">
-                <a:solidFill>
-                  <a:srgbClr val="898781"/>
-                </a:solidFill>
-                <a:latin typeface="Calibri" pitchFamily="34" charset="0"/>
-                <a:ea typeface="Calibri" pitchFamily="34" charset="-122"/>
-                <a:cs typeface="Calibri" pitchFamily="34" charset="-120"/>
-              </a:rPr>
-              <a:t>Las dos cohortes que rompían el clasificador binario son las mejores para esta pregunta.</a:t>
-            </a:r>
-            <a:endParaRPr lang="en-US" sz="1050" dirty="0"/>
-          </a:p>
-        </p:txBody>
-      </p:sp>
-      <p:sp>
-        <p:nvSpPr>
-          <p:cNvPr id="8" name="Shape 6"/>
-          <p:cNvSpPr/>
-          <p:nvPr/>
-        </p:nvSpPr>
-        <p:spPr>
-          <a:xfrm>
-            <a:off x="4370832" y="1783080"/>
-            <a:ext cx="3456432" cy="4114800"/>
-          </a:xfrm>
-          <a:prstGeom prst="roundRect">
-            <a:avLst>
-              <a:gd name="adj" fmla="val 1587"/>
-            </a:avLst>
-          </a:prstGeom>
-          <a:solidFill>
-            <a:srgbClr val="F1F0EC"/>
-          </a:solidFill>
-          <a:ln w="7620">
-            <a:solidFill>
-              <a:srgbClr val="E4E3DE"/>
-            </a:solidFill>
-            <a:prstDash val="solid"/>
-          </a:ln>
-          <a:effectLst>
-            <a:outerShdw sx="100000" sy="100000" kx="0" ky="0" algn="bl" rotWithShape="0" blurRad="88900" dist="17780" dir="5400000">
-              <a:srgbClr val="B8B7B2">
-                <a:alpha val="20000"/>
-              </a:srgbClr>
-            </a:outerShdw>
-          </a:effectLst>
-        </p:spPr>
-      </p:sp>
-      <p:sp>
-        <p:nvSpPr>
-          <p:cNvPr id="9" name="Text 7"/>
-          <p:cNvSpPr/>
-          <p:nvPr/>
-        </p:nvSpPr>
-        <p:spPr>
-          <a:xfrm>
-            <a:off x="4663440" y="2029968"/>
-            <a:ext cx="2871216" cy="365760"/>
-          </a:xfrm>
-          <a:prstGeom prst="rect">
-            <a:avLst/>
-          </a:prstGeom>
-          <a:noFill/>
-          <a:ln/>
-        </p:spPr>
-        <p:txBody>
-          <a:bodyPr wrap="square" lIns="0" tIns="0" rIns="0" bIns="0" rtlCol="0" anchor="t"/>
-          <a:lstStyle/>
-          <a:p>
-            <a:pPr indent="0" marL="0">
-              <a:buNone/>
-            </a:pPr>
-            <a:r>
-              <a:rPr lang="en-US" sz="1700" b="1" dirty="0">
-                <a:solidFill>
-                  <a:srgbClr val="1A1D21"/>
-                </a:solidFill>
-                <a:latin typeface="Cambria" pitchFamily="34" charset="0"/>
-                <a:ea typeface="Cambria" pitchFamily="34" charset="-122"/>
-                <a:cs typeface="Cambria" pitchFamily="34" charset="-120"/>
-              </a:rPr>
-              <a:t>Alteración conductora</a:t>
-            </a:r>
-            <a:endParaRPr lang="en-US" sz="1700" dirty="0"/>
-          </a:p>
-        </p:txBody>
-      </p:sp>
-      <p:sp>
-        <p:nvSpPr>
-          <p:cNvPr id="10" name="Text 8"/>
-          <p:cNvSpPr/>
-          <p:nvPr/>
-        </p:nvSpPr>
-        <p:spPr>
-          <a:xfrm>
-            <a:off x="4663440" y="2523744"/>
-            <a:ext cx="2871216" cy="1920240"/>
-          </a:xfrm>
-          <a:prstGeom prst="rect">
-            <a:avLst/>
-          </a:prstGeom>
-          <a:noFill/>
-          <a:ln/>
-        </p:spPr>
-        <p:txBody>
-          <a:bodyPr wrap="square" lIns="0" tIns="0" rIns="0" bIns="0" rtlCol="0" anchor="t"/>
-          <a:lstStyle/>
-          <a:p>
-            <a:pPr indent="0" marL="0">
-              <a:lnSpc>
-                <a:spcPct val="124000"/>
-              </a:lnSpc>
-              <a:buNone/>
-            </a:pPr>
-            <a:r>
-              <a:rPr lang="en-US" sz="1150" dirty="0">
-                <a:solidFill>
-                  <a:srgbClr val="52514E"/>
-                </a:solidFill>
-                <a:latin typeface="Calibri" pitchFamily="34" charset="0"/>
-                <a:ea typeface="Calibri" pitchFamily="34" charset="-122"/>
-                <a:cs typeface="Calibri" pitchFamily="34" charset="-120"/>
-              </a:rPr>
-              <a:t>GSE31210 incluye el estado de los genes conductores: 127 tumores con mutación de EGFR, 20 de KRAS, 11 con fusión de ALK y 68 sin ninguna de las tres.</a:t>
-            </a:r>
-            <a:endParaRPr lang="en-US" sz="1150" dirty="0"/>
-          </a:p>
-        </p:txBody>
-      </p:sp>
-      <p:sp>
-        <p:nvSpPr>
-          <p:cNvPr id="11" name="Text 9"/>
-          <p:cNvSpPr/>
-          <p:nvPr/>
-        </p:nvSpPr>
-        <p:spPr>
-          <a:xfrm>
-            <a:off x="4663440" y="4626864"/>
-            <a:ext cx="2871216" cy="1042416"/>
-          </a:xfrm>
-          <a:prstGeom prst="rect">
-            <a:avLst/>
-          </a:prstGeom>
-          <a:noFill/>
-          <a:ln/>
-        </p:spPr>
-        <p:txBody>
-          <a:bodyPr wrap="square" lIns="0" tIns="0" rIns="0" bIns="0" rtlCol="0" anchor="t"/>
-          <a:lstStyle/>
-          <a:p>
-            <a:pPr indent="0" marL="0">
-              <a:lnSpc>
-                <a:spcPct val="120000"/>
-              </a:lnSpc>
-              <a:buNone/>
-            </a:pPr>
-            <a:r>
-              <a:rPr lang="en-US" sz="1050" i="1" dirty="0">
-                <a:solidFill>
-                  <a:srgbClr val="898781"/>
-                </a:solidFill>
-                <a:latin typeface="Calibri" pitchFamily="34" charset="0"/>
-                <a:ea typeface="Calibri" pitchFamily="34" charset="-122"/>
-                <a:cs typeface="Calibri" pitchFamily="34" charset="-120"/>
-              </a:rPr>
-              <a:t>Predecir la alteración desde el perfil de expresión.</a:t>
-            </a:r>
-            <a:endParaRPr lang="en-US" sz="1050" dirty="0"/>
-          </a:p>
-        </p:txBody>
-      </p:sp>
-      <p:sp>
-        <p:nvSpPr>
-          <p:cNvPr id="12" name="Shape 10"/>
-          <p:cNvSpPr/>
-          <p:nvPr/>
-        </p:nvSpPr>
-        <p:spPr>
-          <a:xfrm>
-            <a:off x="8083296" y="1783080"/>
-            <a:ext cx="3456432" cy="4114800"/>
-          </a:xfrm>
-          <a:prstGeom prst="roundRect">
-            <a:avLst>
-              <a:gd name="adj" fmla="val 1587"/>
-            </a:avLst>
-          </a:prstGeom>
-          <a:solidFill>
-            <a:srgbClr val="F1F0EC"/>
-          </a:solidFill>
-          <a:ln w="7620">
-            <a:solidFill>
-              <a:srgbClr val="E4E3DE"/>
-            </a:solidFill>
-            <a:prstDash val="solid"/>
-          </a:ln>
-          <a:effectLst>
-            <a:outerShdw sx="100000" sy="100000" kx="0" ky="0" algn="bl" rotWithShape="0" blurRad="88900" dist="17780" dir="5400000">
-              <a:srgbClr val="B8B7B2">
-                <a:alpha val="20000"/>
-              </a:srgbClr>
-            </a:outerShdw>
-          </a:effectLst>
-        </p:spPr>
-      </p:sp>
-      <p:sp>
-        <p:nvSpPr>
-          <p:cNvPr id="13" name="Text 11"/>
-          <p:cNvSpPr/>
-          <p:nvPr/>
-        </p:nvSpPr>
-        <p:spPr>
-          <a:xfrm>
-            <a:off x="8375904" y="2029968"/>
-            <a:ext cx="2871216" cy="365760"/>
-          </a:xfrm>
-          <a:prstGeom prst="rect">
-            <a:avLst/>
-          </a:prstGeom>
-          <a:noFill/>
-          <a:ln/>
-        </p:spPr>
-        <p:txBody>
-          <a:bodyPr wrap="square" lIns="0" tIns="0" rIns="0" bIns="0" rtlCol="0" anchor="t"/>
-          <a:lstStyle/>
-          <a:p>
-            <a:pPr indent="0" marL="0">
-              <a:buNone/>
-            </a:pPr>
-            <a:r>
-              <a:rPr lang="en-US" sz="1700" b="1" dirty="0">
-                <a:solidFill>
-                  <a:srgbClr val="1A1D21"/>
-                </a:solidFill>
-                <a:latin typeface="Cambria" pitchFamily="34" charset="0"/>
-                <a:ea typeface="Cambria" pitchFamily="34" charset="-122"/>
-                <a:cs typeface="Cambria" pitchFamily="34" charset="-120"/>
-              </a:rPr>
-              <a:t>Deconvolución celular</a:t>
-            </a:r>
-            <a:endParaRPr lang="en-US" sz="1700" dirty="0"/>
-          </a:p>
-        </p:txBody>
-      </p:sp>
-      <p:sp>
-        <p:nvSpPr>
-          <p:cNvPr id="14" name="Text 12"/>
-          <p:cNvSpPr/>
-          <p:nvPr/>
-        </p:nvSpPr>
-        <p:spPr>
-          <a:xfrm>
-            <a:off x="8375904" y="2523744"/>
-            <a:ext cx="2871216" cy="1920240"/>
-          </a:xfrm>
-          <a:prstGeom prst="rect">
-            <a:avLst/>
-          </a:prstGeom>
-          <a:noFill/>
-          <a:ln/>
-        </p:spPr>
-        <p:txBody>
-          <a:bodyPr wrap="square" lIns="0" tIns="0" rIns="0" bIns="0" rtlCol="0" anchor="t"/>
-          <a:lstStyle/>
-          <a:p>
-            <a:pPr indent="0" marL="0">
-              <a:lnSpc>
-                <a:spcPct val="124000"/>
-              </a:lnSpc>
-              <a:buNone/>
-            </a:pPr>
-            <a:r>
-              <a:rPr lang="en-US" sz="1150" dirty="0">
-                <a:solidFill>
-                  <a:srgbClr val="52514E"/>
-                </a:solidFill>
-                <a:latin typeface="Calibri" pitchFamily="34" charset="0"/>
-                <a:ea typeface="Calibri" pitchFamily="34" charset="-122"/>
-                <a:cs typeface="Calibri" pitchFamily="34" charset="-120"/>
-              </a:rPr>
-              <a:t>Sustituir el panel de marcadores promediado por estimación de proporciones celulares, para cuantificar la composición tisular con rigor.</a:t>
-            </a:r>
-            <a:endParaRPr lang="en-US" sz="1150" dirty="0"/>
-          </a:p>
-        </p:txBody>
-      </p:sp>
-      <p:sp>
-        <p:nvSpPr>
-          <p:cNvPr id="15" name="Text 13"/>
-          <p:cNvSpPr/>
-          <p:nvPr/>
-        </p:nvSpPr>
-        <p:spPr>
-          <a:xfrm>
-            <a:off x="8375904" y="4626864"/>
-            <a:ext cx="2871216" cy="1042416"/>
-          </a:xfrm>
-          <a:prstGeom prst="rect">
-            <a:avLst/>
-          </a:prstGeom>
-          <a:noFill/>
-          <a:ln/>
-        </p:spPr>
-        <p:txBody>
-          <a:bodyPr wrap="square" lIns="0" tIns="0" rIns="0" bIns="0" rtlCol="0" anchor="t"/>
-          <a:lstStyle/>
-          <a:p>
-            <a:pPr indent="0" marL="0">
-              <a:lnSpc>
-                <a:spcPct val="120000"/>
-              </a:lnSpc>
-              <a:buNone/>
-            </a:pPr>
-            <a:r>
-              <a:rPr lang="en-US" sz="1050" i="1" dirty="0">
-                <a:solidFill>
-                  <a:srgbClr val="898781"/>
-                </a:solidFill>
-                <a:latin typeface="Calibri" pitchFamily="34" charset="0"/>
-                <a:ea typeface="Calibri" pitchFamily="34" charset="-122"/>
-                <a:cs typeface="Calibri" pitchFamily="34" charset="-120"/>
-              </a:rPr>
-              <a:t>Y recuperar las tres cohortes de RNA-seq no procesadas, que permitirían evaluar la transferencia entre plataformas.</a:t>
-            </a:r>
-            <a:endParaRPr lang="en-US" sz="1050" dirty="0"/>
-          </a:p>
-        </p:txBody>
-      </p:sp>
-      <p:sp>
-        <p:nvSpPr>
-          <p:cNvPr id="16" name="Text 14"/>
-          <p:cNvSpPr/>
-          <p:nvPr/>
-        </p:nvSpPr>
-        <p:spPr>
-          <a:xfrm>
-            <a:off x="658368" y="6382512"/>
-            <a:ext cx="10844784" cy="256032"/>
-          </a:xfrm>
-          <a:prstGeom prst="rect">
-            <a:avLst/>
-          </a:prstGeom>
-          <a:noFill/>
-          <a:ln/>
-        </p:spPr>
-        <p:txBody>
-          <a:bodyPr wrap="square" lIns="0" tIns="0" rIns="0" bIns="0" rtlCol="0" anchor="ctr"/>
-          <a:lstStyle/>
-          <a:p>
-            <a:pPr indent="0" marL="0">
-              <a:buNone/>
-            </a:pPr>
-            <a:r>
-              <a:rPr lang="en-US" sz="900" i="1" dirty="0">
-                <a:solidFill>
-                  <a:srgbClr val="898781"/>
-                </a:solidFill>
-                <a:latin typeface="Calibri" pitchFamily="34" charset="0"/>
-                <a:ea typeface="Calibri" pitchFamily="34" charset="-122"/>
-                <a:cs typeface="Calibri" pitchFamily="34" charset="-120"/>
-              </a:rPr>
-              <a:t>Ninguna requiere descargar datos nuevos: los metadatos clínicos ya están en disco y no se habían utilizado.</a:t>
-            </a:r>
-            <a:endParaRPr lang="en-US" sz="900" dirty="0"/>
+              <a:t>Un framework que no puede rechazar su propio resultado no está validando: está confirmando.</a:t>
+            </a:r>
+            <a:endParaRPr lang="en-US" sz="1600" dirty="0"/>
           </a:p>
         </p:txBody>
       </p:sp>
@@ -7889,7 +7904,7 @@
                 <a:ea typeface="Calibri" pitchFamily="34" charset="-122"/>
                 <a:cs typeface="Calibri" pitchFamily="34" charset="-120"/>
               </a:rPr>
-              <a:t>REFERENCIAS</a:t>
+              <a:t>LÍNEAS FUTURAS</a:t>
             </a:r>
             <a:endParaRPr lang="en-US" sz="1000" dirty="0"/>
           </a:p>
@@ -7928,7 +7943,7 @@
                 <a:ea typeface="Cambria" pitchFamily="34" charset="-122"/>
                 <a:cs typeface="Cambria" pitchFamily="34" charset="-120"/>
               </a:rPr>
-              <a:t>Referencias</a:t>
+              <a:t>Preguntas que estos mismos datos ya permiten</a:t>
             </a:r>
             <a:endParaRPr lang="en-US" sz="3200" dirty="0"/>
           </a:p>
@@ -7936,312 +7951,18 @@
       </p:sp>
       <p:sp>
         <p:nvSpPr>
-          <p:cNvPr id="4" name="Text 2"/>
-          <p:cNvSpPr/>
-          <p:nvPr/>
-        </p:nvSpPr>
-        <p:spPr>
-          <a:xfrm>
-            <a:off x="658368" y="1627632"/>
-            <a:ext cx="6858000" cy="365760"/>
-          </a:xfrm>
-          <a:prstGeom prst="rect">
-            <a:avLst/>
-          </a:prstGeom>
-          <a:noFill/>
-          <a:ln/>
-        </p:spPr>
-        <p:txBody>
-          <a:bodyPr wrap="square" lIns="0" tIns="0" rIns="0" bIns="0" rtlCol="0" anchor="t"/>
-          <a:lstStyle/>
-          <a:p>
-            <a:pPr indent="0" marL="0">
-              <a:lnSpc>
-                <a:spcPct val="114000"/>
-              </a:lnSpc>
-              <a:buNone/>
-            </a:pPr>
-            <a:r>
-              <a:rPr lang="en-US" sz="1050" dirty="0">
-                <a:solidFill>
-                  <a:srgbClr val="52514E"/>
-                </a:solidFill>
-                <a:latin typeface="Calibri" pitchFamily="34" charset="0"/>
-                <a:ea typeface="Calibri" pitchFamily="34" charset="-122"/>
-                <a:cs typeface="Calibri" pitchFamily="34" charset="-120"/>
-              </a:rPr>
-              <a:t>Bray, F. et al. (2024). Global cancer statistics 2022: GLOBOCAN estimates of incidence and mortality worldwide. CA: A Cancer Journal for Clinicians, 74(3).</a:t>
-            </a:r>
-            <a:endParaRPr lang="en-US" sz="1050" dirty="0"/>
-          </a:p>
-        </p:txBody>
-      </p:sp>
-      <p:sp>
-        <p:nvSpPr>
-          <p:cNvPr id="5" name="Text 3"/>
-          <p:cNvSpPr/>
-          <p:nvPr/>
-        </p:nvSpPr>
-        <p:spPr>
-          <a:xfrm>
-            <a:off x="658368" y="2029968"/>
-            <a:ext cx="6858000" cy="365760"/>
-          </a:xfrm>
-          <a:prstGeom prst="rect">
-            <a:avLst/>
-          </a:prstGeom>
-          <a:noFill/>
-          <a:ln/>
-        </p:spPr>
-        <p:txBody>
-          <a:bodyPr wrap="square" lIns="0" tIns="0" rIns="0" bIns="0" rtlCol="0" anchor="t"/>
-          <a:lstStyle/>
-          <a:p>
-            <a:pPr indent="0" marL="0">
-              <a:lnSpc>
-                <a:spcPct val="114000"/>
-              </a:lnSpc>
-              <a:buNone/>
-            </a:pPr>
-            <a:r>
-              <a:rPr lang="en-US" sz="1050" dirty="0">
-                <a:solidFill>
-                  <a:srgbClr val="52514E"/>
-                </a:solidFill>
-                <a:latin typeface="Calibri" pitchFamily="34" charset="0"/>
-                <a:ea typeface="Calibri" pitchFamily="34" charset="-122"/>
-                <a:cs typeface="Calibri" pitchFamily="34" charset="-120"/>
-              </a:rPr>
-              <a:t>Barrett, T. et al. (2013). NCBI GEO: archive for functional genomics data sets — update. Nucleic Acids Research, 41(D1).</a:t>
-            </a:r>
-            <a:endParaRPr lang="en-US" sz="1050" dirty="0"/>
-          </a:p>
-        </p:txBody>
-      </p:sp>
-      <p:sp>
-        <p:nvSpPr>
-          <p:cNvPr id="6" name="Text 4"/>
-          <p:cNvSpPr/>
-          <p:nvPr/>
-        </p:nvSpPr>
-        <p:spPr>
-          <a:xfrm>
-            <a:off x="658368" y="2432304"/>
-            <a:ext cx="6858000" cy="365760"/>
-          </a:xfrm>
-          <a:prstGeom prst="rect">
-            <a:avLst/>
-          </a:prstGeom>
-          <a:noFill/>
-          <a:ln/>
-        </p:spPr>
-        <p:txBody>
-          <a:bodyPr wrap="square" lIns="0" tIns="0" rIns="0" bIns="0" rtlCol="0" anchor="t"/>
-          <a:lstStyle/>
-          <a:p>
-            <a:pPr indent="0" marL="0">
-              <a:lnSpc>
-                <a:spcPct val="114000"/>
-              </a:lnSpc>
-              <a:buNone/>
-            </a:pPr>
-            <a:r>
-              <a:rPr lang="en-US" sz="1050" dirty="0">
-                <a:solidFill>
-                  <a:srgbClr val="52514E"/>
-                </a:solidFill>
-                <a:latin typeface="Calibri" pitchFamily="34" charset="0"/>
-                <a:ea typeface="Calibri" pitchFamily="34" charset="-122"/>
-                <a:cs typeface="Calibri" pitchFamily="34" charset="-120"/>
-              </a:rPr>
-              <a:t>Leek, J. T. et al. (2010). Tackling the widespread and critical impact of batch effects in high-throughput data. Nature Reviews Genetics, 11(10).</a:t>
-            </a:r>
-            <a:endParaRPr lang="en-US" sz="1050" dirty="0"/>
-          </a:p>
-        </p:txBody>
-      </p:sp>
-      <p:sp>
-        <p:nvSpPr>
-          <p:cNvPr id="7" name="Text 5"/>
-          <p:cNvSpPr/>
-          <p:nvPr/>
-        </p:nvSpPr>
-        <p:spPr>
-          <a:xfrm>
-            <a:off x="658368" y="2834640"/>
-            <a:ext cx="6858000" cy="365760"/>
-          </a:xfrm>
-          <a:prstGeom prst="rect">
-            <a:avLst/>
-          </a:prstGeom>
-          <a:noFill/>
-          <a:ln/>
-        </p:spPr>
-        <p:txBody>
-          <a:bodyPr wrap="square" lIns="0" tIns="0" rIns="0" bIns="0" rtlCol="0" anchor="t"/>
-          <a:lstStyle/>
-          <a:p>
-            <a:pPr indent="0" marL="0">
-              <a:lnSpc>
-                <a:spcPct val="114000"/>
-              </a:lnSpc>
-              <a:buNone/>
-            </a:pPr>
-            <a:r>
-              <a:rPr lang="en-US" sz="1050" dirty="0">
-                <a:solidFill>
-                  <a:srgbClr val="52514E"/>
-                </a:solidFill>
-                <a:latin typeface="Calibri" pitchFamily="34" charset="0"/>
-                <a:ea typeface="Calibri" pitchFamily="34" charset="-122"/>
-                <a:cs typeface="Calibri" pitchFamily="34" charset="-120"/>
-              </a:rPr>
-              <a:t>Bernau, C. et al. (2014). Cross-study validation for the assessment of prediction algorithms. Bioinformatics, 30(12).</a:t>
-            </a:r>
-            <a:endParaRPr lang="en-US" sz="1050" dirty="0"/>
-          </a:p>
-        </p:txBody>
-      </p:sp>
-      <p:sp>
-        <p:nvSpPr>
-          <p:cNvPr id="8" name="Text 6"/>
-          <p:cNvSpPr/>
-          <p:nvPr/>
-        </p:nvSpPr>
-        <p:spPr>
-          <a:xfrm>
-            <a:off x="658368" y="3236976"/>
-            <a:ext cx="6858000" cy="365760"/>
-          </a:xfrm>
-          <a:prstGeom prst="rect">
-            <a:avLst/>
-          </a:prstGeom>
-          <a:noFill/>
-          <a:ln/>
-        </p:spPr>
-        <p:txBody>
-          <a:bodyPr wrap="square" lIns="0" tIns="0" rIns="0" bIns="0" rtlCol="0" anchor="t"/>
-          <a:lstStyle/>
-          <a:p>
-            <a:pPr indent="0" marL="0">
-              <a:lnSpc>
-                <a:spcPct val="114000"/>
-              </a:lnSpc>
-              <a:buNone/>
-            </a:pPr>
-            <a:r>
-              <a:rPr lang="en-US" sz="1050" dirty="0">
-                <a:solidFill>
-                  <a:srgbClr val="52514E"/>
-                </a:solidFill>
-                <a:latin typeface="Calibri" pitchFamily="34" charset="0"/>
-                <a:ea typeface="Calibri" pitchFamily="34" charset="-122"/>
-                <a:cs typeface="Calibri" pitchFamily="34" charset="-120"/>
-              </a:rPr>
-              <a:t>Ioannidis, J. P. A. (2005). Why most published research findings are false. PLoS Medicine, 2(8).</a:t>
-            </a:r>
-            <a:endParaRPr lang="en-US" sz="1050" dirty="0"/>
-          </a:p>
-        </p:txBody>
-      </p:sp>
-      <p:sp>
-        <p:nvSpPr>
-          <p:cNvPr id="9" name="Text 7"/>
-          <p:cNvSpPr/>
-          <p:nvPr/>
-        </p:nvSpPr>
-        <p:spPr>
-          <a:xfrm>
-            <a:off x="658368" y="3639312"/>
-            <a:ext cx="6858000" cy="365760"/>
-          </a:xfrm>
-          <a:prstGeom prst="rect">
-            <a:avLst/>
-          </a:prstGeom>
-          <a:noFill/>
-          <a:ln/>
-        </p:spPr>
-        <p:txBody>
-          <a:bodyPr wrap="square" lIns="0" tIns="0" rIns="0" bIns="0" rtlCol="0" anchor="t"/>
-          <a:lstStyle/>
-          <a:p>
-            <a:pPr indent="0" marL="0">
-              <a:lnSpc>
-                <a:spcPct val="114000"/>
-              </a:lnSpc>
-              <a:buNone/>
-            </a:pPr>
-            <a:r>
-              <a:rPr lang="en-US" sz="1050" dirty="0">
-                <a:solidFill>
-                  <a:srgbClr val="52514E"/>
-                </a:solidFill>
-                <a:latin typeface="Calibri" pitchFamily="34" charset="0"/>
-                <a:ea typeface="Calibri" pitchFamily="34" charset="-122"/>
-                <a:cs typeface="Calibri" pitchFamily="34" charset="-120"/>
-              </a:rPr>
-              <a:t>Benjamini, Y. y Hochberg, Y. (1995). Controlling the false discovery rate. Journal of the Royal Statistical Society B, 57(1).</a:t>
-            </a:r>
-            <a:endParaRPr lang="en-US" sz="1050" dirty="0"/>
-          </a:p>
-        </p:txBody>
-      </p:sp>
-      <p:sp>
-        <p:nvSpPr>
-          <p:cNvPr id="10" name="Text 8"/>
-          <p:cNvSpPr/>
-          <p:nvPr/>
-        </p:nvSpPr>
-        <p:spPr>
-          <a:xfrm>
-            <a:off x="658368" y="4041648"/>
-            <a:ext cx="6858000" cy="365760"/>
-          </a:xfrm>
-          <a:prstGeom prst="rect">
-            <a:avLst/>
-          </a:prstGeom>
-          <a:noFill/>
-          <a:ln/>
-        </p:spPr>
-        <p:txBody>
-          <a:bodyPr wrap="square" lIns="0" tIns="0" rIns="0" bIns="0" rtlCol="0" anchor="t"/>
-          <a:lstStyle/>
-          <a:p>
-            <a:pPr indent="0" marL="0">
-              <a:lnSpc>
-                <a:spcPct val="114000"/>
-              </a:lnSpc>
-              <a:buNone/>
-            </a:pPr>
-            <a:r>
-              <a:rPr lang="en-US" sz="1050" dirty="0">
-                <a:solidFill>
-                  <a:srgbClr val="52514E"/>
-                </a:solidFill>
-                <a:latin typeface="Calibri" pitchFamily="34" charset="0"/>
-                <a:ea typeface="Calibri" pitchFamily="34" charset="-122"/>
-                <a:cs typeface="Calibri" pitchFamily="34" charset="-120"/>
-              </a:rPr>
-              <a:t>Tibshirani, R. (1996). Regression shrinkage and selection via the lasso. Journal of the Royal Statistical Society B, 58(1).</a:t>
-            </a:r>
-            <a:endParaRPr lang="en-US" sz="1050" dirty="0"/>
-          </a:p>
-        </p:txBody>
-      </p:sp>
-      <p:sp>
-        <p:nvSpPr>
-          <p:cNvPr id="11" name="Shape 9"/>
-          <p:cNvSpPr/>
-          <p:nvPr/>
-        </p:nvSpPr>
-        <p:spPr>
-          <a:xfrm>
-            <a:off x="7772400" y="1627632"/>
-            <a:ext cx="3730752" cy="3383280"/>
+          <p:cNvPr id="4" name="Shape 2"/>
+          <p:cNvSpPr/>
+          <p:nvPr/>
+        </p:nvSpPr>
+        <p:spPr>
+          <a:xfrm>
+            <a:off x="658368" y="1783080"/>
+            <a:ext cx="3456432" cy="4114800"/>
           </a:xfrm>
           <a:prstGeom prst="roundRect">
             <a:avLst>
-              <a:gd name="adj" fmla="val 1622"/>
+              <a:gd name="adj" fmla="val 1587"/>
             </a:avLst>
           </a:prstGeom>
           <a:solidFill>
@@ -8264,14 +7985,14 @@
       </p:sp>
       <p:sp>
         <p:nvSpPr>
-          <p:cNvPr id="12" name="Text 10"/>
-          <p:cNvSpPr/>
-          <p:nvPr/>
-        </p:nvSpPr>
-        <p:spPr>
-          <a:xfrm>
-            <a:off x="8065008" y="1865376"/>
-            <a:ext cx="3145536" cy="256032"/>
+          <p:cNvPr id="5" name="Text 3"/>
+          <p:cNvSpPr/>
+          <p:nvPr/>
+        </p:nvSpPr>
+        <p:spPr>
+          <a:xfrm>
+            <a:off x="950976" y="2029968"/>
+            <a:ext cx="2871216" cy="365760"/>
           </a:xfrm>
           <a:prstGeom prst="rect">
             <a:avLst/>
@@ -8280,37 +8001,79 @@
           <a:ln/>
         </p:spPr>
         <p:txBody>
-          <a:bodyPr wrap="square" lIns="0" tIns="0" rIns="0" bIns="0" rtlCol="0" anchor="ctr"/>
-          <a:lstStyle/>
-          <a:p>
-            <a:pPr indent="0" marL="0">
-              <a:buNone/>
-            </a:pPr>
-            <a:r>
-              <a:rPr lang="en-US" sz="950" b="1" spc="150" kern="0" dirty="0">
-                <a:solidFill>
-                  <a:srgbClr val="898781"/>
+          <a:bodyPr wrap="square" lIns="0" tIns="0" rIns="0" bIns="0" rtlCol="0" anchor="t"/>
+          <a:lstStyle/>
+          <a:p>
+            <a:pPr indent="0" marL="0">
+              <a:buNone/>
+            </a:pPr>
+            <a:r>
+              <a:rPr lang="en-US" sz="1700" b="1" dirty="0">
+                <a:solidFill>
+                  <a:srgbClr val="1A1D21"/>
+                </a:solidFill>
+                <a:latin typeface="Cambria" pitchFamily="34" charset="0"/>
+                <a:ea typeface="Cambria" pitchFamily="34" charset="-122"/>
+                <a:cs typeface="Cambria" pitchFamily="34" charset="-120"/>
+              </a:rPr>
+              <a:t>Pronóstico</a:t>
+            </a:r>
+            <a:endParaRPr lang="en-US" sz="1700" dirty="0"/>
+          </a:p>
+        </p:txBody>
+      </p:sp>
+      <p:sp>
+        <p:nvSpPr>
+          <p:cNvPr id="6" name="Text 4"/>
+          <p:cNvSpPr/>
+          <p:nvPr/>
+        </p:nvSpPr>
+        <p:spPr>
+          <a:xfrm>
+            <a:off x="950976" y="2523744"/>
+            <a:ext cx="2871216" cy="1920240"/>
+          </a:xfrm>
+          <a:prstGeom prst="rect">
+            <a:avLst/>
+          </a:prstGeom>
+          <a:noFill/>
+          <a:ln/>
+        </p:spPr>
+        <p:txBody>
+          <a:bodyPr wrap="square" lIns="0" tIns="0" rIns="0" bIns="0" rtlCol="0" anchor="t"/>
+          <a:lstStyle/>
+          <a:p>
+            <a:pPr indent="0" marL="0">
+              <a:lnSpc>
+                <a:spcPct val="124000"/>
+              </a:lnSpc>
+              <a:buNone/>
+            </a:pPr>
+            <a:r>
+              <a:rPr lang="en-US" sz="1150" dirty="0">
+                <a:solidFill>
+                  <a:srgbClr val="52514E"/>
                 </a:solidFill>
                 <a:latin typeface="Calibri" pitchFamily="34" charset="0"/>
                 <a:ea typeface="Calibri" pitchFamily="34" charset="-122"/>
                 <a:cs typeface="Calibri" pitchFamily="34" charset="-120"/>
               </a:rPr>
-              <a:t>COHORTES ANALIZADAS</a:t>
-            </a:r>
-            <a:endParaRPr lang="en-US" sz="950" dirty="0"/>
-          </a:p>
-        </p:txBody>
-      </p:sp>
-      <p:sp>
-        <p:nvSpPr>
-          <p:cNvPr id="13" name="Text 11"/>
-          <p:cNvSpPr/>
-          <p:nvPr/>
-        </p:nvSpPr>
-        <p:spPr>
-          <a:xfrm>
-            <a:off x="8065008" y="2194560"/>
-            <a:ext cx="3145536" cy="1371600"/>
+              <a:t>GSE30219 y GSE50081 tienen seguimiento clínico completo: 307 y 181 tumores, con 200 y 75 eventos de mortalidad. Análisis de supervivencia con validación cruzada entre cohortes.</a:t>
+            </a:r>
+            <a:endParaRPr lang="en-US" sz="1150" dirty="0"/>
+          </a:p>
+        </p:txBody>
+      </p:sp>
+      <p:sp>
+        <p:nvSpPr>
+          <p:cNvPr id="7" name="Text 5"/>
+          <p:cNvSpPr/>
+          <p:nvPr/>
+        </p:nvSpPr>
+        <p:spPr>
+          <a:xfrm>
+            <a:off x="950976" y="4626864"/>
+            <a:ext cx="2871216" cy="1042416"/>
           </a:xfrm>
           <a:prstGeom prst="rect">
             <a:avLst/>
@@ -8324,35 +8087,150 @@
           <a:p>
             <a:pPr indent="0" marL="0">
               <a:lnSpc>
-                <a:spcPct val="130000"/>
+                <a:spcPct val="120000"/>
               </a:lnSpc>
               <a:buNone/>
             </a:pPr>
             <a:r>
-              <a:rPr lang="en-US" sz="1100" dirty="0">
-                <a:solidFill>
-                  <a:srgbClr val="52514E"/>
+              <a:rPr lang="en-US" sz="1050" i="1" dirty="0">
+                <a:solidFill>
+                  <a:srgbClr val="898781"/>
                 </a:solidFill>
                 <a:latin typeface="Calibri" pitchFamily="34" charset="0"/>
                 <a:ea typeface="Calibri" pitchFamily="34" charset="-122"/>
                 <a:cs typeface="Calibri" pitchFamily="34" charset="-120"/>
               </a:rPr>
-              <a:t>GSE118370 · GSE140797 · GSE18842 · GSE19188 · GSE19804 · GSE23066 · GSE30219 · GSE31210 · GSE40791 · GSE50081 · GSE7670</a:t>
-            </a:r>
-            <a:endParaRPr lang="en-US" sz="1100" dirty="0"/>
-          </a:p>
-        </p:txBody>
-      </p:sp>
-      <p:sp>
-        <p:nvSpPr>
-          <p:cNvPr id="14" name="Text 12"/>
-          <p:cNvSpPr/>
-          <p:nvPr/>
-        </p:nvSpPr>
-        <p:spPr>
-          <a:xfrm>
-            <a:off x="8065008" y="3584448"/>
-            <a:ext cx="3145536" cy="1280160"/>
+              <a:t>Las dos cohortes que rompían el clasificador binario son las mejores para esta pregunta.</a:t>
+            </a:r>
+            <a:endParaRPr lang="en-US" sz="1050" dirty="0"/>
+          </a:p>
+        </p:txBody>
+      </p:sp>
+      <p:sp>
+        <p:nvSpPr>
+          <p:cNvPr id="8" name="Shape 6"/>
+          <p:cNvSpPr/>
+          <p:nvPr/>
+        </p:nvSpPr>
+        <p:spPr>
+          <a:xfrm>
+            <a:off x="4370832" y="1783080"/>
+            <a:ext cx="3456432" cy="4114800"/>
+          </a:xfrm>
+          <a:prstGeom prst="roundRect">
+            <a:avLst>
+              <a:gd name="adj" fmla="val 1587"/>
+            </a:avLst>
+          </a:prstGeom>
+          <a:solidFill>
+            <a:srgbClr val="F1F0EC"/>
+          </a:solidFill>
+          <a:ln w="7620">
+            <a:solidFill>
+              <a:srgbClr val="E4E3DE"/>
+            </a:solidFill>
+            <a:prstDash val="solid"/>
+          </a:ln>
+          <a:effectLst>
+            <a:outerShdw sx="100000" sy="100000" kx="0" ky="0" algn="bl" rotWithShape="0" blurRad="88900" dist="17780" dir="5400000">
+              <a:srgbClr val="B8B7B2">
+                <a:alpha val="20000"/>
+              </a:srgbClr>
+            </a:outerShdw>
+          </a:effectLst>
+        </p:spPr>
+      </p:sp>
+      <p:sp>
+        <p:nvSpPr>
+          <p:cNvPr id="9" name="Text 7"/>
+          <p:cNvSpPr/>
+          <p:nvPr/>
+        </p:nvSpPr>
+        <p:spPr>
+          <a:xfrm>
+            <a:off x="4663440" y="2029968"/>
+            <a:ext cx="2871216" cy="365760"/>
+          </a:xfrm>
+          <a:prstGeom prst="rect">
+            <a:avLst/>
+          </a:prstGeom>
+          <a:noFill/>
+          <a:ln/>
+        </p:spPr>
+        <p:txBody>
+          <a:bodyPr wrap="square" lIns="0" tIns="0" rIns="0" bIns="0" rtlCol="0" anchor="t"/>
+          <a:lstStyle/>
+          <a:p>
+            <a:pPr indent="0" marL="0">
+              <a:buNone/>
+            </a:pPr>
+            <a:r>
+              <a:rPr lang="en-US" sz="1700" b="1" dirty="0">
+                <a:solidFill>
+                  <a:srgbClr val="1A1D21"/>
+                </a:solidFill>
+                <a:latin typeface="Cambria" pitchFamily="34" charset="0"/>
+                <a:ea typeface="Cambria" pitchFamily="34" charset="-122"/>
+                <a:cs typeface="Cambria" pitchFamily="34" charset="-120"/>
+              </a:rPr>
+              <a:t>Alteración conductora</a:t>
+            </a:r>
+            <a:endParaRPr lang="en-US" sz="1700" dirty="0"/>
+          </a:p>
+        </p:txBody>
+      </p:sp>
+      <p:sp>
+        <p:nvSpPr>
+          <p:cNvPr id="10" name="Text 8"/>
+          <p:cNvSpPr/>
+          <p:nvPr/>
+        </p:nvSpPr>
+        <p:spPr>
+          <a:xfrm>
+            <a:off x="4663440" y="2523744"/>
+            <a:ext cx="2871216" cy="1920240"/>
+          </a:xfrm>
+          <a:prstGeom prst="rect">
+            <a:avLst/>
+          </a:prstGeom>
+          <a:noFill/>
+          <a:ln/>
+        </p:spPr>
+        <p:txBody>
+          <a:bodyPr wrap="square" lIns="0" tIns="0" rIns="0" bIns="0" rtlCol="0" anchor="t"/>
+          <a:lstStyle/>
+          <a:p>
+            <a:pPr indent="0" marL="0">
+              <a:lnSpc>
+                <a:spcPct val="124000"/>
+              </a:lnSpc>
+              <a:buNone/>
+            </a:pPr>
+            <a:r>
+              <a:rPr lang="en-US" sz="1150" dirty="0">
+                <a:solidFill>
+                  <a:srgbClr val="52514E"/>
+                </a:solidFill>
+                <a:latin typeface="Calibri" pitchFamily="34" charset="0"/>
+                <a:ea typeface="Calibri" pitchFamily="34" charset="-122"/>
+                <a:cs typeface="Calibri" pitchFamily="34" charset="-120"/>
+              </a:rPr>
+              <a:t>GSE31210 incluye el estado de los genes conductores: 127 tumores con mutación de EGFR, 20 de KRAS, 11 con fusión de ALK y 68 sin ninguna de las tres.</a:t>
+            </a:r>
+            <a:endParaRPr lang="en-US" sz="1150" dirty="0"/>
+          </a:p>
+        </p:txBody>
+      </p:sp>
+      <p:sp>
+        <p:nvSpPr>
+          <p:cNvPr id="11" name="Text 9"/>
+          <p:cNvSpPr/>
+          <p:nvPr/>
+        </p:nvSpPr>
+        <p:spPr>
+          <a:xfrm>
+            <a:off x="4663440" y="4626864"/>
+            <a:ext cx="2871216" cy="1042416"/>
           </a:xfrm>
           <a:prstGeom prst="rect">
             <a:avLst/>
@@ -8371,7 +8249,7 @@
               <a:buNone/>
             </a:pPr>
             <a:r>
-              <a:rPr lang="en-US" sz="1000" dirty="0">
+              <a:rPr lang="en-US" sz="1050" i="1" dirty="0">
                 <a:solidFill>
                   <a:srgbClr val="898781"/>
                 </a:solidFill>
@@ -8379,22 +8257,56 @@
                 <a:ea typeface="Calibri" pitchFamily="34" charset="-122"/>
                 <a:cs typeface="Calibri" pitchFamily="34" charset="-120"/>
               </a:rPr>
-              <a:t>Publicaciones originales de las cohortes principales: Rousseaux et al. (2013), Sci Transl Med, GSE30219 · Der et al. (2014), J Thorac Oncol, GSE50081 · Okayama et al. (2012), Cancer Res, GSE31210 · Hou et al. (2010), PLoS ONE, GSE19188.</a:t>
-            </a:r>
-            <a:endParaRPr lang="en-US" sz="1000" dirty="0"/>
-          </a:p>
-        </p:txBody>
-      </p:sp>
-      <p:sp>
-        <p:nvSpPr>
-          <p:cNvPr id="15" name="Text 13"/>
-          <p:cNvSpPr/>
-          <p:nvPr/>
-        </p:nvSpPr>
-        <p:spPr>
-          <a:xfrm>
-            <a:off x="658368" y="5394960"/>
-            <a:ext cx="10844784" cy="365760"/>
+              <a:t>Predecir la alteración desde el perfil de expresión.</a:t>
+            </a:r>
+            <a:endParaRPr lang="en-US" sz="1050" dirty="0"/>
+          </a:p>
+        </p:txBody>
+      </p:sp>
+      <p:sp>
+        <p:nvSpPr>
+          <p:cNvPr id="12" name="Shape 10"/>
+          <p:cNvSpPr/>
+          <p:nvPr/>
+        </p:nvSpPr>
+        <p:spPr>
+          <a:xfrm>
+            <a:off x="8083296" y="1783080"/>
+            <a:ext cx="3456432" cy="4114800"/>
+          </a:xfrm>
+          <a:prstGeom prst="roundRect">
+            <a:avLst>
+              <a:gd name="adj" fmla="val 1587"/>
+            </a:avLst>
+          </a:prstGeom>
+          <a:solidFill>
+            <a:srgbClr val="F1F0EC"/>
+          </a:solidFill>
+          <a:ln w="7620">
+            <a:solidFill>
+              <a:srgbClr val="E4E3DE"/>
+            </a:solidFill>
+            <a:prstDash val="solid"/>
+          </a:ln>
+          <a:effectLst>
+            <a:outerShdw sx="100000" sy="100000" kx="0" ky="0" algn="bl" rotWithShape="0" blurRad="88900" dist="17780" dir="5400000">
+              <a:srgbClr val="B8B7B2">
+                <a:alpha val="20000"/>
+              </a:srgbClr>
+            </a:outerShdw>
+          </a:effectLst>
+        </p:spPr>
+      </p:sp>
+      <p:sp>
+        <p:nvSpPr>
+          <p:cNvPr id="13" name="Text 11"/>
+          <p:cNvSpPr/>
+          <p:nvPr/>
+        </p:nvSpPr>
+        <p:spPr>
+          <a:xfrm>
+            <a:off x="8375904" y="2029968"/>
+            <a:ext cx="2871216" cy="365760"/>
           </a:xfrm>
           <a:prstGeom prst="rect">
             <a:avLst/>
@@ -8403,22 +8315,64 @@
           <a:ln/>
         </p:spPr>
         <p:txBody>
-          <a:bodyPr wrap="square" lIns="0" tIns="0" rIns="0" bIns="0" rtlCol="0" anchor="ctr"/>
-          <a:lstStyle/>
-          <a:p>
-            <a:pPr indent="0" marL="0">
+          <a:bodyPr wrap="square" lIns="0" tIns="0" rIns="0" bIns="0" rtlCol="0" anchor="t"/>
+          <a:lstStyle/>
+          <a:p>
+            <a:pPr indent="0" marL="0">
+              <a:buNone/>
+            </a:pPr>
+            <a:r>
+              <a:rPr lang="en-US" sz="1700" b="1" dirty="0">
+                <a:solidFill>
+                  <a:srgbClr val="1A1D21"/>
+                </a:solidFill>
+                <a:latin typeface="Cambria" pitchFamily="34" charset="0"/>
+                <a:ea typeface="Cambria" pitchFamily="34" charset="-122"/>
+                <a:cs typeface="Cambria" pitchFamily="34" charset="-120"/>
+              </a:rPr>
+              <a:t>Deconvolución celular</a:t>
+            </a:r>
+            <a:endParaRPr lang="en-US" sz="1700" dirty="0"/>
+          </a:p>
+        </p:txBody>
+      </p:sp>
+      <p:sp>
+        <p:nvSpPr>
+          <p:cNvPr id="14" name="Text 12"/>
+          <p:cNvSpPr/>
+          <p:nvPr/>
+        </p:nvSpPr>
+        <p:spPr>
+          <a:xfrm>
+            <a:off x="8375904" y="2523744"/>
+            <a:ext cx="2871216" cy="1920240"/>
+          </a:xfrm>
+          <a:prstGeom prst="rect">
+            <a:avLst/>
+          </a:prstGeom>
+          <a:noFill/>
+          <a:ln/>
+        </p:spPr>
+        <p:txBody>
+          <a:bodyPr wrap="square" lIns="0" tIns="0" rIns="0" bIns="0" rtlCol="0" anchor="t"/>
+          <a:lstStyle/>
+          <a:p>
+            <a:pPr indent="0" marL="0">
+              <a:lnSpc>
+                <a:spcPct val="124000"/>
+              </a:lnSpc>
               <a:buNone/>
             </a:pPr>
             <a:r>
               <a:rPr lang="en-US" sz="1150" dirty="0">
                 <a:solidFill>
-                  <a:srgbClr val="1A1D21"/>
+                  <a:srgbClr val="52514E"/>
                 </a:solidFill>
                 <a:latin typeface="Calibri" pitchFamily="34" charset="0"/>
                 <a:ea typeface="Calibri" pitchFamily="34" charset="-122"/>
                 <a:cs typeface="Calibri" pitchFamily="34" charset="-120"/>
               </a:rPr>
-              <a:t>Código y resultados: github.com/danitapiadiez-gif/TFM-Bioinformatica</a:t>
+              <a:t>Sustituir el panel de marcadores promediado por estimación de proporciones celulares, para cuantificar la composición tisular con rigor.</a:t>
             </a:r>
             <a:endParaRPr lang="en-US" sz="1150" dirty="0"/>
           </a:p>
@@ -8426,14 +8380,14 @@
       </p:sp>
       <p:sp>
         <p:nvSpPr>
-          <p:cNvPr id="16" name="Text 14"/>
-          <p:cNvSpPr/>
-          <p:nvPr/>
-        </p:nvSpPr>
-        <p:spPr>
-          <a:xfrm>
-            <a:off x="658368" y="6382512"/>
-            <a:ext cx="10844784" cy="256032"/>
+          <p:cNvPr id="15" name="Text 13"/>
+          <p:cNvSpPr/>
+          <p:nvPr/>
+        </p:nvSpPr>
+        <p:spPr>
+          <a:xfrm>
+            <a:off x="8375904" y="4626864"/>
+            <a:ext cx="2871216" cy="1042416"/>
           </a:xfrm>
           <a:prstGeom prst="rect">
             <a:avLst/>
@@ -8442,14 +8396,17 @@
           <a:ln/>
         </p:spPr>
         <p:txBody>
-          <a:bodyPr wrap="square" lIns="0" tIns="0" rIns="0" bIns="0" rtlCol="0" anchor="ctr"/>
-          <a:lstStyle/>
-          <a:p>
-            <a:pPr indent="0" marL="0">
-              <a:buNone/>
-            </a:pPr>
-            <a:r>
-              <a:rPr lang="en-US" sz="900" i="1" dirty="0">
+          <a:bodyPr wrap="square" lIns="0" tIns="0" rIns="0" bIns="0" rtlCol="0" anchor="t"/>
+          <a:lstStyle/>
+          <a:p>
+            <a:pPr indent="0" marL="0">
+              <a:lnSpc>
+                <a:spcPct val="120000"/>
+              </a:lnSpc>
+              <a:buNone/>
+            </a:pPr>
+            <a:r>
+              <a:rPr lang="en-US" sz="1050" i="1" dirty="0">
                 <a:solidFill>
                   <a:srgbClr val="898781"/>
                 </a:solidFill>
@@ -8457,7 +8414,46 @@
                 <a:ea typeface="Calibri" pitchFamily="34" charset="-122"/>
                 <a:cs typeface="Calibri" pitchFamily="34" charset="-120"/>
               </a:rPr>
-              <a:t>Todos los análisis son reproducibles: random_state fijado, y las tablas y figuras se generan desde los CSV de resultados.</a:t>
+              <a:t>Y recuperar las tres cohortes de RNA-seq no procesadas, que permitirían evaluar la transferencia entre plataformas.</a:t>
+            </a:r>
+            <a:endParaRPr lang="en-US" sz="1050" dirty="0"/>
+          </a:p>
+        </p:txBody>
+      </p:sp>
+      <p:sp>
+        <p:nvSpPr>
+          <p:cNvPr id="16" name="Text 14"/>
+          <p:cNvSpPr/>
+          <p:nvPr/>
+        </p:nvSpPr>
+        <p:spPr>
+          <a:xfrm>
+            <a:off x="658368" y="6382512"/>
+            <a:ext cx="10844784" cy="256032"/>
+          </a:xfrm>
+          <a:prstGeom prst="rect">
+            <a:avLst/>
+          </a:prstGeom>
+          <a:noFill/>
+          <a:ln/>
+        </p:spPr>
+        <p:txBody>
+          <a:bodyPr wrap="square" lIns="0" tIns="0" rIns="0" bIns="0" rtlCol="0" anchor="ctr"/>
+          <a:lstStyle/>
+          <a:p>
+            <a:pPr indent="0" marL="0">
+              <a:buNone/>
+            </a:pPr>
+            <a:r>
+              <a:rPr lang="en-US" sz="900" i="1" dirty="0">
+                <a:solidFill>
+                  <a:srgbClr val="898781"/>
+                </a:solidFill>
+                <a:latin typeface="Calibri" pitchFamily="34" charset="0"/>
+                <a:ea typeface="Calibri" pitchFamily="34" charset="-122"/>
+                <a:cs typeface="Calibri" pitchFamily="34" charset="-120"/>
+              </a:rPr>
+              <a:t>Ninguna requiere descargar datos nuevos: los metadatos clínicos ya están en disco y no se habían utilizado.</a:t>
             </a:r>
             <a:endParaRPr lang="en-US" sz="900" dirty="0"/>
           </a:p>
@@ -8474,6 +8470,645 @@
 <file path=ppt/slides/slide18.xml><?xml version="1.0" encoding="utf-8"?>
 <p:sld xmlns:a="http://schemas.openxmlformats.org/drawingml/2006/main" xmlns:r="http://schemas.openxmlformats.org/officeDocument/2006/relationships" xmlns:p="http://schemas.openxmlformats.org/presentationml/2006/main">
   <p:cSld name="Slide 18">
+    <p:bg>
+      <p:bgPr>
+        <a:solidFill>
+          <a:srgbClr val="FCFCFB"/>
+        </a:solidFill>
+      </p:bgPr>
+    </p:bg>
+    <p:spTree>
+      <p:nvGrpSpPr>
+        <p:cNvPr id="1" name=""/>
+        <p:cNvGrpSpPr/>
+        <p:nvPr/>
+      </p:nvGrpSpPr>
+      <p:grpSpPr>
+        <a:xfrm>
+          <a:off x="0" y="0"/>
+          <a:ext cx="0" cy="0"/>
+          <a:chOff x="0" y="0"/>
+          <a:chExt cx="0" cy="0"/>
+        </a:xfrm>
+      </p:grpSpPr>
+      <p:sp>
+        <p:nvSpPr>
+          <p:cNvPr id="2" name="Text 0"/>
+          <p:cNvSpPr/>
+          <p:nvPr/>
+        </p:nvSpPr>
+        <p:spPr>
+          <a:xfrm>
+            <a:off x="658368" y="182880"/>
+            <a:ext cx="10844784" cy="237744"/>
+          </a:xfrm>
+          <a:prstGeom prst="rect">
+            <a:avLst/>
+          </a:prstGeom>
+          <a:noFill/>
+          <a:ln/>
+        </p:spPr>
+        <p:txBody>
+          <a:bodyPr wrap="square" lIns="0" tIns="0" rIns="0" bIns="0" rtlCol="0" anchor="ctr"/>
+          <a:lstStyle/>
+          <a:p>
+            <a:pPr indent="0" marL="0">
+              <a:buNone/>
+            </a:pPr>
+            <a:r>
+              <a:rPr lang="en-US" sz="1000" b="1" spc="240" kern="0" dirty="0">
+                <a:solidFill>
+                  <a:srgbClr val="898781"/>
+                </a:solidFill>
+                <a:latin typeface="Calibri" pitchFamily="34" charset="0"/>
+                <a:ea typeface="Calibri" pitchFamily="34" charset="-122"/>
+                <a:cs typeface="Calibri" pitchFamily="34" charset="-120"/>
+              </a:rPr>
+              <a:t>REFERENCIAS</a:t>
+            </a:r>
+            <a:endParaRPr lang="en-US" sz="1000" dirty="0"/>
+          </a:p>
+        </p:txBody>
+      </p:sp>
+      <p:sp>
+        <p:nvSpPr>
+          <p:cNvPr id="3" name="Text 1"/>
+          <p:cNvSpPr/>
+          <p:nvPr/>
+        </p:nvSpPr>
+        <p:spPr>
+          <a:xfrm>
+            <a:off x="658368" y="420624"/>
+            <a:ext cx="10844784" cy="1097280"/>
+          </a:xfrm>
+          <a:prstGeom prst="rect">
+            <a:avLst/>
+          </a:prstGeom>
+          <a:noFill/>
+          <a:ln/>
+        </p:spPr>
+        <p:txBody>
+          <a:bodyPr wrap="square" lIns="0" tIns="0" rIns="0" bIns="0" rtlCol="0" anchor="t"/>
+          <a:lstStyle/>
+          <a:p>
+            <a:pPr indent="0" marL="0">
+              <a:buNone/>
+            </a:pPr>
+            <a:r>
+              <a:rPr lang="en-US" sz="3200" b="1" dirty="0">
+                <a:solidFill>
+                  <a:srgbClr val="1A1D21"/>
+                </a:solidFill>
+                <a:latin typeface="Cambria" pitchFamily="34" charset="0"/>
+                <a:ea typeface="Cambria" pitchFamily="34" charset="-122"/>
+                <a:cs typeface="Cambria" pitchFamily="34" charset="-120"/>
+              </a:rPr>
+              <a:t>Referencias</a:t>
+            </a:r>
+            <a:endParaRPr lang="en-US" sz="3200" dirty="0"/>
+          </a:p>
+        </p:txBody>
+      </p:sp>
+      <p:sp>
+        <p:nvSpPr>
+          <p:cNvPr id="4" name="Text 2"/>
+          <p:cNvSpPr/>
+          <p:nvPr/>
+        </p:nvSpPr>
+        <p:spPr>
+          <a:xfrm>
+            <a:off x="658368" y="1627632"/>
+            <a:ext cx="6858000" cy="365760"/>
+          </a:xfrm>
+          <a:prstGeom prst="rect">
+            <a:avLst/>
+          </a:prstGeom>
+          <a:noFill/>
+          <a:ln/>
+        </p:spPr>
+        <p:txBody>
+          <a:bodyPr wrap="square" lIns="0" tIns="0" rIns="0" bIns="0" rtlCol="0" anchor="t"/>
+          <a:lstStyle/>
+          <a:p>
+            <a:pPr indent="0" marL="0">
+              <a:lnSpc>
+                <a:spcPct val="114000"/>
+              </a:lnSpc>
+              <a:buNone/>
+            </a:pPr>
+            <a:r>
+              <a:rPr lang="en-US" sz="1050" dirty="0">
+                <a:solidFill>
+                  <a:srgbClr val="52514E"/>
+                </a:solidFill>
+                <a:latin typeface="Calibri" pitchFamily="34" charset="0"/>
+                <a:ea typeface="Calibri" pitchFamily="34" charset="-122"/>
+                <a:cs typeface="Calibri" pitchFamily="34" charset="-120"/>
+              </a:rPr>
+              <a:t>Bray, F. et al. (2024). Global cancer statistics 2022: GLOBOCAN estimates of incidence and mortality worldwide. CA: A Cancer Journal for Clinicians, 74(3).</a:t>
+            </a:r>
+            <a:endParaRPr lang="en-US" sz="1050" dirty="0"/>
+          </a:p>
+        </p:txBody>
+      </p:sp>
+      <p:sp>
+        <p:nvSpPr>
+          <p:cNvPr id="5" name="Text 3"/>
+          <p:cNvSpPr/>
+          <p:nvPr/>
+        </p:nvSpPr>
+        <p:spPr>
+          <a:xfrm>
+            <a:off x="658368" y="2029968"/>
+            <a:ext cx="6858000" cy="365760"/>
+          </a:xfrm>
+          <a:prstGeom prst="rect">
+            <a:avLst/>
+          </a:prstGeom>
+          <a:noFill/>
+          <a:ln/>
+        </p:spPr>
+        <p:txBody>
+          <a:bodyPr wrap="square" lIns="0" tIns="0" rIns="0" bIns="0" rtlCol="0" anchor="t"/>
+          <a:lstStyle/>
+          <a:p>
+            <a:pPr indent="0" marL="0">
+              <a:lnSpc>
+                <a:spcPct val="114000"/>
+              </a:lnSpc>
+              <a:buNone/>
+            </a:pPr>
+            <a:r>
+              <a:rPr lang="en-US" sz="1050" dirty="0">
+                <a:solidFill>
+                  <a:srgbClr val="52514E"/>
+                </a:solidFill>
+                <a:latin typeface="Calibri" pitchFamily="34" charset="0"/>
+                <a:ea typeface="Calibri" pitchFamily="34" charset="-122"/>
+                <a:cs typeface="Calibri" pitchFamily="34" charset="-120"/>
+              </a:rPr>
+              <a:t>Barrett, T. et al. (2013). NCBI GEO: archive for functional genomics data sets — update. Nucleic Acids Research, 41(D1).</a:t>
+            </a:r>
+            <a:endParaRPr lang="en-US" sz="1050" dirty="0"/>
+          </a:p>
+        </p:txBody>
+      </p:sp>
+      <p:sp>
+        <p:nvSpPr>
+          <p:cNvPr id="6" name="Text 4"/>
+          <p:cNvSpPr/>
+          <p:nvPr/>
+        </p:nvSpPr>
+        <p:spPr>
+          <a:xfrm>
+            <a:off x="658368" y="2432304"/>
+            <a:ext cx="6858000" cy="365760"/>
+          </a:xfrm>
+          <a:prstGeom prst="rect">
+            <a:avLst/>
+          </a:prstGeom>
+          <a:noFill/>
+          <a:ln/>
+        </p:spPr>
+        <p:txBody>
+          <a:bodyPr wrap="square" lIns="0" tIns="0" rIns="0" bIns="0" rtlCol="0" anchor="t"/>
+          <a:lstStyle/>
+          <a:p>
+            <a:pPr indent="0" marL="0">
+              <a:lnSpc>
+                <a:spcPct val="114000"/>
+              </a:lnSpc>
+              <a:buNone/>
+            </a:pPr>
+            <a:r>
+              <a:rPr lang="en-US" sz="1050" dirty="0">
+                <a:solidFill>
+                  <a:srgbClr val="52514E"/>
+                </a:solidFill>
+                <a:latin typeface="Calibri" pitchFamily="34" charset="0"/>
+                <a:ea typeface="Calibri" pitchFamily="34" charset="-122"/>
+                <a:cs typeface="Calibri" pitchFamily="34" charset="-120"/>
+              </a:rPr>
+              <a:t>Leek, J. T. et al. (2010). Tackling the widespread and critical impact of batch effects in high-throughput data. Nature Reviews Genetics, 11(10).</a:t>
+            </a:r>
+            <a:endParaRPr lang="en-US" sz="1050" dirty="0"/>
+          </a:p>
+        </p:txBody>
+      </p:sp>
+      <p:sp>
+        <p:nvSpPr>
+          <p:cNvPr id="7" name="Text 5"/>
+          <p:cNvSpPr/>
+          <p:nvPr/>
+        </p:nvSpPr>
+        <p:spPr>
+          <a:xfrm>
+            <a:off x="658368" y="2834640"/>
+            <a:ext cx="6858000" cy="365760"/>
+          </a:xfrm>
+          <a:prstGeom prst="rect">
+            <a:avLst/>
+          </a:prstGeom>
+          <a:noFill/>
+          <a:ln/>
+        </p:spPr>
+        <p:txBody>
+          <a:bodyPr wrap="square" lIns="0" tIns="0" rIns="0" bIns="0" rtlCol="0" anchor="t"/>
+          <a:lstStyle/>
+          <a:p>
+            <a:pPr indent="0" marL="0">
+              <a:lnSpc>
+                <a:spcPct val="114000"/>
+              </a:lnSpc>
+              <a:buNone/>
+            </a:pPr>
+            <a:r>
+              <a:rPr lang="en-US" sz="1050" dirty="0">
+                <a:solidFill>
+                  <a:srgbClr val="52514E"/>
+                </a:solidFill>
+                <a:latin typeface="Calibri" pitchFamily="34" charset="0"/>
+                <a:ea typeface="Calibri" pitchFamily="34" charset="-122"/>
+                <a:cs typeface="Calibri" pitchFamily="34" charset="-120"/>
+              </a:rPr>
+              <a:t>Bernau, C. et al. (2014). Cross-study validation for the assessment of prediction algorithms. Bioinformatics, 30(12).</a:t>
+            </a:r>
+            <a:endParaRPr lang="en-US" sz="1050" dirty="0"/>
+          </a:p>
+        </p:txBody>
+      </p:sp>
+      <p:sp>
+        <p:nvSpPr>
+          <p:cNvPr id="8" name="Text 6"/>
+          <p:cNvSpPr/>
+          <p:nvPr/>
+        </p:nvSpPr>
+        <p:spPr>
+          <a:xfrm>
+            <a:off x="658368" y="3236976"/>
+            <a:ext cx="6858000" cy="365760"/>
+          </a:xfrm>
+          <a:prstGeom prst="rect">
+            <a:avLst/>
+          </a:prstGeom>
+          <a:noFill/>
+          <a:ln/>
+        </p:spPr>
+        <p:txBody>
+          <a:bodyPr wrap="square" lIns="0" tIns="0" rIns="0" bIns="0" rtlCol="0" anchor="t"/>
+          <a:lstStyle/>
+          <a:p>
+            <a:pPr indent="0" marL="0">
+              <a:lnSpc>
+                <a:spcPct val="114000"/>
+              </a:lnSpc>
+              <a:buNone/>
+            </a:pPr>
+            <a:r>
+              <a:rPr lang="en-US" sz="1050" dirty="0">
+                <a:solidFill>
+                  <a:srgbClr val="52514E"/>
+                </a:solidFill>
+                <a:latin typeface="Calibri" pitchFamily="34" charset="0"/>
+                <a:ea typeface="Calibri" pitchFamily="34" charset="-122"/>
+                <a:cs typeface="Calibri" pitchFamily="34" charset="-120"/>
+              </a:rPr>
+              <a:t>Ioannidis, J. P. A. (2005). Why most published research findings are false. PLoS Medicine, 2(8).</a:t>
+            </a:r>
+            <a:endParaRPr lang="en-US" sz="1050" dirty="0"/>
+          </a:p>
+        </p:txBody>
+      </p:sp>
+      <p:sp>
+        <p:nvSpPr>
+          <p:cNvPr id="9" name="Text 7"/>
+          <p:cNvSpPr/>
+          <p:nvPr/>
+        </p:nvSpPr>
+        <p:spPr>
+          <a:xfrm>
+            <a:off x="658368" y="3639312"/>
+            <a:ext cx="6858000" cy="365760"/>
+          </a:xfrm>
+          <a:prstGeom prst="rect">
+            <a:avLst/>
+          </a:prstGeom>
+          <a:noFill/>
+          <a:ln/>
+        </p:spPr>
+        <p:txBody>
+          <a:bodyPr wrap="square" lIns="0" tIns="0" rIns="0" bIns="0" rtlCol="0" anchor="t"/>
+          <a:lstStyle/>
+          <a:p>
+            <a:pPr indent="0" marL="0">
+              <a:lnSpc>
+                <a:spcPct val="114000"/>
+              </a:lnSpc>
+              <a:buNone/>
+            </a:pPr>
+            <a:r>
+              <a:rPr lang="en-US" sz="1050" dirty="0">
+                <a:solidFill>
+                  <a:srgbClr val="52514E"/>
+                </a:solidFill>
+                <a:latin typeface="Calibri" pitchFamily="34" charset="0"/>
+                <a:ea typeface="Calibri" pitchFamily="34" charset="-122"/>
+                <a:cs typeface="Calibri" pitchFamily="34" charset="-120"/>
+              </a:rPr>
+              <a:t>Benjamini, Y. y Hochberg, Y. (1995). Controlling the false discovery rate. Journal of the Royal Statistical Society B, 57(1).</a:t>
+            </a:r>
+            <a:endParaRPr lang="en-US" sz="1050" dirty="0"/>
+          </a:p>
+        </p:txBody>
+      </p:sp>
+      <p:sp>
+        <p:nvSpPr>
+          <p:cNvPr id="10" name="Text 8"/>
+          <p:cNvSpPr/>
+          <p:nvPr/>
+        </p:nvSpPr>
+        <p:spPr>
+          <a:xfrm>
+            <a:off x="658368" y="4041648"/>
+            <a:ext cx="6858000" cy="365760"/>
+          </a:xfrm>
+          <a:prstGeom prst="rect">
+            <a:avLst/>
+          </a:prstGeom>
+          <a:noFill/>
+          <a:ln/>
+        </p:spPr>
+        <p:txBody>
+          <a:bodyPr wrap="square" lIns="0" tIns="0" rIns="0" bIns="0" rtlCol="0" anchor="t"/>
+          <a:lstStyle/>
+          <a:p>
+            <a:pPr indent="0" marL="0">
+              <a:lnSpc>
+                <a:spcPct val="114000"/>
+              </a:lnSpc>
+              <a:buNone/>
+            </a:pPr>
+            <a:r>
+              <a:rPr lang="en-US" sz="1050" dirty="0">
+                <a:solidFill>
+                  <a:srgbClr val="52514E"/>
+                </a:solidFill>
+                <a:latin typeface="Calibri" pitchFamily="34" charset="0"/>
+                <a:ea typeface="Calibri" pitchFamily="34" charset="-122"/>
+                <a:cs typeface="Calibri" pitchFamily="34" charset="-120"/>
+              </a:rPr>
+              <a:t>Tibshirani, R. (1996). Regression shrinkage and selection via the lasso. Journal of the Royal Statistical Society B, 58(1).</a:t>
+            </a:r>
+            <a:endParaRPr lang="en-US" sz="1050" dirty="0"/>
+          </a:p>
+        </p:txBody>
+      </p:sp>
+      <p:sp>
+        <p:nvSpPr>
+          <p:cNvPr id="11" name="Shape 9"/>
+          <p:cNvSpPr/>
+          <p:nvPr/>
+        </p:nvSpPr>
+        <p:spPr>
+          <a:xfrm>
+            <a:off x="7772400" y="1627632"/>
+            <a:ext cx="3730752" cy="3383280"/>
+          </a:xfrm>
+          <a:prstGeom prst="roundRect">
+            <a:avLst>
+              <a:gd name="adj" fmla="val 1622"/>
+            </a:avLst>
+          </a:prstGeom>
+          <a:solidFill>
+            <a:srgbClr val="F1F0EC"/>
+          </a:solidFill>
+          <a:ln w="7620">
+            <a:solidFill>
+              <a:srgbClr val="E4E3DE"/>
+            </a:solidFill>
+            <a:prstDash val="solid"/>
+          </a:ln>
+          <a:effectLst>
+            <a:outerShdw sx="100000" sy="100000" kx="0" ky="0" algn="bl" rotWithShape="0" blurRad="88900" dist="17780" dir="5400000">
+              <a:srgbClr val="B8B7B2">
+                <a:alpha val="20000"/>
+              </a:srgbClr>
+            </a:outerShdw>
+          </a:effectLst>
+        </p:spPr>
+      </p:sp>
+      <p:sp>
+        <p:nvSpPr>
+          <p:cNvPr id="12" name="Text 10"/>
+          <p:cNvSpPr/>
+          <p:nvPr/>
+        </p:nvSpPr>
+        <p:spPr>
+          <a:xfrm>
+            <a:off x="8065008" y="1865376"/>
+            <a:ext cx="3145536" cy="256032"/>
+          </a:xfrm>
+          <a:prstGeom prst="rect">
+            <a:avLst/>
+          </a:prstGeom>
+          <a:noFill/>
+          <a:ln/>
+        </p:spPr>
+        <p:txBody>
+          <a:bodyPr wrap="square" lIns="0" tIns="0" rIns="0" bIns="0" rtlCol="0" anchor="ctr"/>
+          <a:lstStyle/>
+          <a:p>
+            <a:pPr indent="0" marL="0">
+              <a:buNone/>
+            </a:pPr>
+            <a:r>
+              <a:rPr lang="en-US" sz="950" b="1" spc="150" kern="0" dirty="0">
+                <a:solidFill>
+                  <a:srgbClr val="898781"/>
+                </a:solidFill>
+                <a:latin typeface="Calibri" pitchFamily="34" charset="0"/>
+                <a:ea typeface="Calibri" pitchFamily="34" charset="-122"/>
+                <a:cs typeface="Calibri" pitchFamily="34" charset="-120"/>
+              </a:rPr>
+              <a:t>COHORTES ANALIZADAS</a:t>
+            </a:r>
+            <a:endParaRPr lang="en-US" sz="950" dirty="0"/>
+          </a:p>
+        </p:txBody>
+      </p:sp>
+      <p:sp>
+        <p:nvSpPr>
+          <p:cNvPr id="13" name="Text 11"/>
+          <p:cNvSpPr/>
+          <p:nvPr/>
+        </p:nvSpPr>
+        <p:spPr>
+          <a:xfrm>
+            <a:off x="8065008" y="2194560"/>
+            <a:ext cx="3145536" cy="1371600"/>
+          </a:xfrm>
+          <a:prstGeom prst="rect">
+            <a:avLst/>
+          </a:prstGeom>
+          <a:noFill/>
+          <a:ln/>
+        </p:spPr>
+        <p:txBody>
+          <a:bodyPr wrap="square" lIns="0" tIns="0" rIns="0" bIns="0" rtlCol="0" anchor="t"/>
+          <a:lstStyle/>
+          <a:p>
+            <a:pPr indent="0" marL="0">
+              <a:lnSpc>
+                <a:spcPct val="130000"/>
+              </a:lnSpc>
+              <a:buNone/>
+            </a:pPr>
+            <a:r>
+              <a:rPr lang="en-US" sz="1100" dirty="0">
+                <a:solidFill>
+                  <a:srgbClr val="52514E"/>
+                </a:solidFill>
+                <a:latin typeface="Calibri" pitchFamily="34" charset="0"/>
+                <a:ea typeface="Calibri" pitchFamily="34" charset="-122"/>
+                <a:cs typeface="Calibri" pitchFamily="34" charset="-120"/>
+              </a:rPr>
+              <a:t>GSE118370 · GSE140797 · GSE18842 · GSE19188 · GSE19804 · GSE23066 · GSE30219 · GSE31210 · GSE40791 · GSE50081 · GSE7670</a:t>
+            </a:r>
+            <a:endParaRPr lang="en-US" sz="1100" dirty="0"/>
+          </a:p>
+        </p:txBody>
+      </p:sp>
+      <p:sp>
+        <p:nvSpPr>
+          <p:cNvPr id="14" name="Text 12"/>
+          <p:cNvSpPr/>
+          <p:nvPr/>
+        </p:nvSpPr>
+        <p:spPr>
+          <a:xfrm>
+            <a:off x="8065008" y="3584448"/>
+            <a:ext cx="3145536" cy="1280160"/>
+          </a:xfrm>
+          <a:prstGeom prst="rect">
+            <a:avLst/>
+          </a:prstGeom>
+          <a:noFill/>
+          <a:ln/>
+        </p:spPr>
+        <p:txBody>
+          <a:bodyPr wrap="square" lIns="0" tIns="0" rIns="0" bIns="0" rtlCol="0" anchor="t"/>
+          <a:lstStyle/>
+          <a:p>
+            <a:pPr indent="0" marL="0">
+              <a:lnSpc>
+                <a:spcPct val="120000"/>
+              </a:lnSpc>
+              <a:buNone/>
+            </a:pPr>
+            <a:r>
+              <a:rPr lang="en-US" sz="1000" dirty="0">
+                <a:solidFill>
+                  <a:srgbClr val="898781"/>
+                </a:solidFill>
+                <a:latin typeface="Calibri" pitchFamily="34" charset="0"/>
+                <a:ea typeface="Calibri" pitchFamily="34" charset="-122"/>
+                <a:cs typeface="Calibri" pitchFamily="34" charset="-120"/>
+              </a:rPr>
+              <a:t>Publicaciones originales de las cohortes principales: Rousseaux et al. (2013), Sci Transl Med, GSE30219 · Der et al. (2014), J Thorac Oncol, GSE50081 · Okayama et al. (2012), Cancer Res, GSE31210 · Hou et al. (2010), PLoS ONE, GSE19188.</a:t>
+            </a:r>
+            <a:endParaRPr lang="en-US" sz="1000" dirty="0"/>
+          </a:p>
+        </p:txBody>
+      </p:sp>
+      <p:sp>
+        <p:nvSpPr>
+          <p:cNvPr id="15" name="Text 13"/>
+          <p:cNvSpPr/>
+          <p:nvPr/>
+        </p:nvSpPr>
+        <p:spPr>
+          <a:xfrm>
+            <a:off x="658368" y="5394960"/>
+            <a:ext cx="10844784" cy="365760"/>
+          </a:xfrm>
+          <a:prstGeom prst="rect">
+            <a:avLst/>
+          </a:prstGeom>
+          <a:noFill/>
+          <a:ln/>
+        </p:spPr>
+        <p:txBody>
+          <a:bodyPr wrap="square" lIns="0" tIns="0" rIns="0" bIns="0" rtlCol="0" anchor="ctr"/>
+          <a:lstStyle/>
+          <a:p>
+            <a:pPr indent="0" marL="0">
+              <a:buNone/>
+            </a:pPr>
+            <a:r>
+              <a:rPr lang="en-US" sz="1150" dirty="0">
+                <a:solidFill>
+                  <a:srgbClr val="1A1D21"/>
+                </a:solidFill>
+                <a:latin typeface="Calibri" pitchFamily="34" charset="0"/>
+                <a:ea typeface="Calibri" pitchFamily="34" charset="-122"/>
+                <a:cs typeface="Calibri" pitchFamily="34" charset="-120"/>
+              </a:rPr>
+              <a:t>Código y resultados: github.com/danitapiadiez-gif/TFM-Bioinformatica</a:t>
+            </a:r>
+            <a:endParaRPr lang="en-US" sz="1150" dirty="0"/>
+          </a:p>
+        </p:txBody>
+      </p:sp>
+      <p:sp>
+        <p:nvSpPr>
+          <p:cNvPr id="16" name="Text 14"/>
+          <p:cNvSpPr/>
+          <p:nvPr/>
+        </p:nvSpPr>
+        <p:spPr>
+          <a:xfrm>
+            <a:off x="658368" y="6382512"/>
+            <a:ext cx="10844784" cy="256032"/>
+          </a:xfrm>
+          <a:prstGeom prst="rect">
+            <a:avLst/>
+          </a:prstGeom>
+          <a:noFill/>
+          <a:ln/>
+        </p:spPr>
+        <p:txBody>
+          <a:bodyPr wrap="square" lIns="0" tIns="0" rIns="0" bIns="0" rtlCol="0" anchor="ctr"/>
+          <a:lstStyle/>
+          <a:p>
+            <a:pPr indent="0" marL="0">
+              <a:buNone/>
+            </a:pPr>
+            <a:r>
+              <a:rPr lang="en-US" sz="900" i="1" dirty="0">
+                <a:solidFill>
+                  <a:srgbClr val="898781"/>
+                </a:solidFill>
+                <a:latin typeface="Calibri" pitchFamily="34" charset="0"/>
+                <a:ea typeface="Calibri" pitchFamily="34" charset="-122"/>
+                <a:cs typeface="Calibri" pitchFamily="34" charset="-120"/>
+              </a:rPr>
+              <a:t>Todos los análisis son reproducibles: random_state fijado, y las tablas y figuras se generan desde los CSV de resultados.</a:t>
+            </a:r>
+            <a:endParaRPr lang="en-US" sz="900" dirty="0"/>
+          </a:p>
+        </p:txBody>
+      </p:sp>
+    </p:spTree>
+  </p:cSld>
+  <p:clrMapOvr>
+    <a:masterClrMapping/>
+  </p:clrMapOvr>
+</p:sld>
+</file>
+
+<file path=ppt/slides/slide19.xml><?xml version="1.0" encoding="utf-8"?>
+<p:sld xmlns:a="http://schemas.openxmlformats.org/drawingml/2006/main" xmlns:r="http://schemas.openxmlformats.org/officeDocument/2006/relationships" xmlns:p="http://schemas.openxmlformats.org/presentationml/2006/main">
+  <p:cSld name="Slide 19">
     <p:bg>
       <p:bgPr>
         <a:solidFill>
@@ -8771,7 +9406,7 @@
                 <a:ea typeface="Cambria" pitchFamily="34" charset="-122"/>
                 <a:cs typeface="Cambria" pitchFamily="34" charset="-120"/>
               </a:rPr>
-              <a:t>Una firma molecular que funciona en un estudio</a:t>
+              <a:t>Identificar biomarcadores es fácil. Que replique</a:t>
             </a:r>
             <a:endParaRPr lang="en-US" sz="2700" dirty="0"/>
           </a:p>
@@ -8788,7 +9423,7 @@
                 <a:ea typeface="Cambria" pitchFamily="34" charset="-122"/>
                 <a:cs typeface="Cambria" pitchFamily="34" charset="-120"/>
               </a:rPr>
-              <a:t>suele no funcionar en el siguiente</a:t>
+              <a:t>en otra cohorte, no</a:t>
             </a:r>
             <a:endParaRPr lang="en-US" sz="2700" dirty="0"/>
           </a:p>
@@ -8872,7 +9507,7 @@
                 <a:ea typeface="Cambria" pitchFamily="34" charset="-122"/>
                 <a:cs typeface="Cambria" pitchFamily="34" charset="-120"/>
               </a:rPr>
-              <a:t>La pregunta que este trabajo acabó respondiendo no es «qué genes» sino «por qué el pipeline no avisa cuando se equivoca».</a:t>
+              <a:t>De ahí el diseño del framework: la identificación no basta si no viene acompañada de una capa que decida cuándo la firma es creíble.</a:t>
             </a:r>
             <a:endParaRPr lang="en-US" sz="1500" dirty="0"/>
           </a:p>
@@ -9250,7 +9885,7 @@
                 <a:ea typeface="Calibri" pitchFamily="34" charset="-122"/>
                 <a:cs typeface="Calibri" pitchFamily="34" charset="-120"/>
               </a:rPr>
-              <a:t>REORIENTACIÓN DEL OBJETO DE ESTUDIO</a:t>
+              <a:t>ARQUITECTURA DEL FRAMEWORK</a:t>
             </a:r>
             <a:endParaRPr lang="en-US" sz="1000" dirty="0"/>
           </a:p>
@@ -9289,7 +9924,7 @@
                 <a:ea typeface="Cambria" pitchFamily="34" charset="-122"/>
                 <a:cs typeface="Cambria" pitchFamily="34" charset="-120"/>
               </a:rPr>
-              <a:t>El planteamiento inicial no se sostuvo</a:t>
+              <a:t>Tres capas, y la tercera decide si las otras dos sirven</a:t>
             </a:r>
             <a:endParaRPr lang="en-US" sz="3200" dirty="0"/>
           </a:p>
@@ -9304,11 +9939,11 @@
         <p:spPr>
           <a:xfrm>
             <a:off x="658368" y="1874520"/>
-            <a:ext cx="5257800" cy="3566160"/>
+            <a:ext cx="3456432" cy="3703320"/>
           </a:xfrm>
           <a:prstGeom prst="roundRect">
             <a:avLst>
-              <a:gd name="adj" fmla="val 1538"/>
+              <a:gd name="adj" fmla="val 1587"/>
             </a:avLst>
           </a:prstGeom>
           <a:solidFill>
@@ -9331,14 +9966,39 @@
       </p:sp>
       <p:sp>
         <p:nvSpPr>
-          <p:cNvPr id="5" name="Text 3"/>
-          <p:cNvSpPr/>
-          <p:nvPr/>
-        </p:nvSpPr>
-        <p:spPr>
-          <a:xfrm>
-            <a:off x="969264" y="2139696"/>
-            <a:ext cx="4663440" cy="256032"/>
+          <p:cNvPr id="5" name="Shape 3"/>
+          <p:cNvSpPr/>
+          <p:nvPr/>
+        </p:nvSpPr>
+        <p:spPr>
+          <a:xfrm>
+            <a:off x="950976" y="2121408"/>
+            <a:ext cx="402336" cy="402336"/>
+          </a:xfrm>
+          <a:prstGeom prst="ellipse">
+            <a:avLst/>
+          </a:prstGeom>
+          <a:solidFill>
+            <a:srgbClr val="FCFCFB"/>
+          </a:solidFill>
+          <a:ln w="12700">
+            <a:solidFill>
+              <a:srgbClr val="2A78D6"/>
+            </a:solidFill>
+            <a:prstDash val="solid"/>
+          </a:ln>
+        </p:spPr>
+      </p:sp>
+      <p:sp>
+        <p:nvSpPr>
+          <p:cNvPr id="6" name="Text 4"/>
+          <p:cNvSpPr/>
+          <p:nvPr/>
+        </p:nvSpPr>
+        <p:spPr>
+          <a:xfrm>
+            <a:off x="950976" y="2121408"/>
+            <a:ext cx="402336" cy="402336"/>
           </a:xfrm>
           <a:prstGeom prst="rect">
             <a:avLst/>
@@ -9350,34 +10010,294 @@
           <a:bodyPr wrap="square" lIns="0" tIns="0" rIns="0" bIns="0" rtlCol="0" anchor="ctr"/>
           <a:lstStyle/>
           <a:p>
-            <a:pPr indent="0" marL="0">
-              <a:buNone/>
-            </a:pPr>
-            <a:r>
-              <a:rPr lang="en-US" sz="1000" b="1" spc="180" kern="0" dirty="0">
-                <a:solidFill>
-                  <a:srgbClr val="898781"/>
+            <a:pPr algn="ctr" indent="0" marL="0">
+              <a:buNone/>
+            </a:pPr>
+            <a:r>
+              <a:rPr lang="en-US" sz="1400" b="1" dirty="0">
+                <a:solidFill>
+                  <a:srgbClr val="2A78D6"/>
+                </a:solidFill>
+                <a:latin typeface="Cambria" pitchFamily="34" charset="0"/>
+                <a:ea typeface="Cambria" pitchFamily="34" charset="-122"/>
+                <a:cs typeface="Cambria" pitchFamily="34" charset="-120"/>
+              </a:rPr>
+              <a:t>1</a:t>
+            </a:r>
+            <a:endParaRPr lang="en-US" sz="1400" dirty="0"/>
+          </a:p>
+        </p:txBody>
+      </p:sp>
+      <p:sp>
+        <p:nvSpPr>
+          <p:cNvPr id="7" name="Text 5"/>
+          <p:cNvSpPr/>
+          <p:nvPr/>
+        </p:nvSpPr>
+        <p:spPr>
+          <a:xfrm>
+            <a:off x="950976" y="2651760"/>
+            <a:ext cx="2871216" cy="365760"/>
+          </a:xfrm>
+          <a:prstGeom prst="rect">
+            <a:avLst/>
+          </a:prstGeom>
+          <a:noFill/>
+          <a:ln/>
+        </p:spPr>
+        <p:txBody>
+          <a:bodyPr wrap="square" lIns="0" tIns="0" rIns="0" bIns="0" rtlCol="0" anchor="t"/>
+          <a:lstStyle/>
+          <a:p>
+            <a:pPr indent="0" marL="0">
+              <a:buNone/>
+            </a:pPr>
+            <a:r>
+              <a:rPr lang="en-US" sz="1600" b="1" dirty="0">
+                <a:solidFill>
+                  <a:srgbClr val="1A1D21"/>
+                </a:solidFill>
+                <a:latin typeface="Cambria" pitchFamily="34" charset="0"/>
+                <a:ea typeface="Cambria" pitchFamily="34" charset="-122"/>
+                <a:cs typeface="Cambria" pitchFamily="34" charset="-120"/>
+              </a:rPr>
+              <a:t>Curación clínica con LLM</a:t>
+            </a:r>
+            <a:endParaRPr lang="en-US" sz="1600" dirty="0"/>
+          </a:p>
+        </p:txBody>
+      </p:sp>
+      <p:sp>
+        <p:nvSpPr>
+          <p:cNvPr id="8" name="Text 6"/>
+          <p:cNvSpPr/>
+          <p:nvPr/>
+        </p:nvSpPr>
+        <p:spPr>
+          <a:xfrm>
+            <a:off x="950976" y="3108960"/>
+            <a:ext cx="2871216" cy="1572768"/>
+          </a:xfrm>
+          <a:prstGeom prst="rect">
+            <a:avLst/>
+          </a:prstGeom>
+          <a:noFill/>
+          <a:ln/>
+        </p:spPr>
+        <p:txBody>
+          <a:bodyPr wrap="square" lIns="0" tIns="0" rIns="0" bIns="0" rtlCol="0" anchor="t"/>
+          <a:lstStyle/>
+          <a:p>
+            <a:pPr indent="0" marL="0">
+              <a:lnSpc>
+                <a:spcPct val="124000"/>
+              </a:lnSpc>
+              <a:buNone/>
+            </a:pPr>
+            <a:r>
+              <a:rPr lang="en-US" sz="1150" dirty="0">
+                <a:solidFill>
+                  <a:srgbClr val="52514E"/>
                 </a:solidFill>
                 <a:latin typeface="Calibri" pitchFamily="34" charset="0"/>
                 <a:ea typeface="Calibri" pitchFamily="34" charset="-122"/>
                 <a:cs typeface="Calibri" pitchFamily="34" charset="-120"/>
               </a:rPr>
-              <a:t>PLANTEAMIENTO INICIAL</a:t>
-            </a:r>
-            <a:endParaRPr lang="en-US" sz="1000" dirty="0"/>
-          </a:p>
-        </p:txBody>
-      </p:sp>
-      <p:sp>
-        <p:nvSpPr>
-          <p:cNvPr id="6" name="Text 4"/>
-          <p:cNvSpPr/>
-          <p:nvPr/>
-        </p:nvSpPr>
-        <p:spPr>
-          <a:xfrm>
-            <a:off x="969264" y="2487168"/>
-            <a:ext cx="4617720" cy="2743200"/>
+              <a:t>Llama 3.3-70b interpreta metadatos no estandarizados de GEO y asigna grupos experimentales comparables. Sustituye una revisión manual de 1397 muestras.</a:t>
+            </a:r>
+            <a:endParaRPr lang="en-US" sz="1150" dirty="0"/>
+          </a:p>
+        </p:txBody>
+      </p:sp>
+      <p:sp>
+        <p:nvSpPr>
+          <p:cNvPr id="9" name="Text 7"/>
+          <p:cNvSpPr/>
+          <p:nvPr/>
+        </p:nvSpPr>
+        <p:spPr>
+          <a:xfrm>
+            <a:off x="950976" y="4754880"/>
+            <a:ext cx="2871216" cy="640080"/>
+          </a:xfrm>
+          <a:prstGeom prst="rect">
+            <a:avLst/>
+          </a:prstGeom>
+          <a:noFill/>
+          <a:ln/>
+        </p:spPr>
+        <p:txBody>
+          <a:bodyPr wrap="square" lIns="0" tIns="0" rIns="0" bIns="0" rtlCol="0" anchor="t"/>
+          <a:lstStyle/>
+          <a:p>
+            <a:pPr indent="0" marL="0">
+              <a:lnSpc>
+                <a:spcPct val="120000"/>
+              </a:lnSpc>
+              <a:buNone/>
+            </a:pPr>
+            <a:r>
+              <a:rPr lang="en-US" sz="1050" b="1" i="1" dirty="0">
+                <a:solidFill>
+                  <a:srgbClr val="1A1D21"/>
+                </a:solidFill>
+                <a:latin typeface="Calibri" pitchFamily="34" charset="0"/>
+                <a:ea typeface="Calibri" pitchFamily="34" charset="-122"/>
+                <a:cs typeface="Calibri" pitchFamily="34" charset="-120"/>
+              </a:rPr>
+              <a:t>Rendimiento medido: 82,8 % de éxito global, con fallo bimodal.</a:t>
+            </a:r>
+            <a:endParaRPr lang="en-US" sz="1050" dirty="0"/>
+          </a:p>
+        </p:txBody>
+      </p:sp>
+      <p:sp>
+        <p:nvSpPr>
+          <p:cNvPr id="10" name="Shape 8"/>
+          <p:cNvSpPr/>
+          <p:nvPr/>
+        </p:nvSpPr>
+        <p:spPr>
+          <a:xfrm>
+            <a:off x="4370832" y="1874520"/>
+            <a:ext cx="3456432" cy="3703320"/>
+          </a:xfrm>
+          <a:prstGeom prst="roundRect">
+            <a:avLst>
+              <a:gd name="adj" fmla="val 1587"/>
+            </a:avLst>
+          </a:prstGeom>
+          <a:solidFill>
+            <a:srgbClr val="F1F0EC"/>
+          </a:solidFill>
+          <a:ln w="7620">
+            <a:solidFill>
+              <a:srgbClr val="E4E3DE"/>
+            </a:solidFill>
+            <a:prstDash val="solid"/>
+          </a:ln>
+          <a:effectLst>
+            <a:outerShdw sx="100000" sy="100000" kx="0" ky="0" algn="bl" rotWithShape="0" blurRad="88900" dist="17780" dir="5400000">
+              <a:srgbClr val="B8B7B2">
+                <a:alpha val="20000"/>
+              </a:srgbClr>
+            </a:outerShdw>
+          </a:effectLst>
+        </p:spPr>
+      </p:sp>
+      <p:sp>
+        <p:nvSpPr>
+          <p:cNvPr id="11" name="Shape 9"/>
+          <p:cNvSpPr/>
+          <p:nvPr/>
+        </p:nvSpPr>
+        <p:spPr>
+          <a:xfrm>
+            <a:off x="4663440" y="2121408"/>
+            <a:ext cx="402336" cy="402336"/>
+          </a:xfrm>
+          <a:prstGeom prst="ellipse">
+            <a:avLst/>
+          </a:prstGeom>
+          <a:solidFill>
+            <a:srgbClr val="FCFCFB"/>
+          </a:solidFill>
+          <a:ln w="12700">
+            <a:solidFill>
+              <a:srgbClr val="2A78D6"/>
+            </a:solidFill>
+            <a:prstDash val="solid"/>
+          </a:ln>
+        </p:spPr>
+      </p:sp>
+      <p:sp>
+        <p:nvSpPr>
+          <p:cNvPr id="12" name="Text 10"/>
+          <p:cNvSpPr/>
+          <p:nvPr/>
+        </p:nvSpPr>
+        <p:spPr>
+          <a:xfrm>
+            <a:off x="4663440" y="2121408"/>
+            <a:ext cx="402336" cy="402336"/>
+          </a:xfrm>
+          <a:prstGeom prst="rect">
+            <a:avLst/>
+          </a:prstGeom>
+          <a:noFill/>
+          <a:ln/>
+        </p:spPr>
+        <p:txBody>
+          <a:bodyPr wrap="square" lIns="0" tIns="0" rIns="0" bIns="0" rtlCol="0" anchor="ctr"/>
+          <a:lstStyle/>
+          <a:p>
+            <a:pPr algn="ctr" indent="0" marL="0">
+              <a:buNone/>
+            </a:pPr>
+            <a:r>
+              <a:rPr lang="en-US" sz="1400" b="1" dirty="0">
+                <a:solidFill>
+                  <a:srgbClr val="2A78D6"/>
+                </a:solidFill>
+                <a:latin typeface="Cambria" pitchFamily="34" charset="0"/>
+                <a:ea typeface="Cambria" pitchFamily="34" charset="-122"/>
+                <a:cs typeface="Cambria" pitchFamily="34" charset="-120"/>
+              </a:rPr>
+              <a:t>2</a:t>
+            </a:r>
+            <a:endParaRPr lang="en-US" sz="1400" dirty="0"/>
+          </a:p>
+        </p:txBody>
+      </p:sp>
+      <p:sp>
+        <p:nvSpPr>
+          <p:cNvPr id="13" name="Text 11"/>
+          <p:cNvSpPr/>
+          <p:nvPr/>
+        </p:nvSpPr>
+        <p:spPr>
+          <a:xfrm>
+            <a:off x="4663440" y="2651760"/>
+            <a:ext cx="2871216" cy="365760"/>
+          </a:xfrm>
+          <a:prstGeom prst="rect">
+            <a:avLst/>
+          </a:prstGeom>
+          <a:noFill/>
+          <a:ln/>
+        </p:spPr>
+        <p:txBody>
+          <a:bodyPr wrap="square" lIns="0" tIns="0" rIns="0" bIns="0" rtlCol="0" anchor="t"/>
+          <a:lstStyle/>
+          <a:p>
+            <a:pPr indent="0" marL="0">
+              <a:buNone/>
+            </a:pPr>
+            <a:r>
+              <a:rPr lang="en-US" sz="1600" b="1" dirty="0">
+                <a:solidFill>
+                  <a:srgbClr val="1A1D21"/>
+                </a:solidFill>
+                <a:latin typeface="Cambria" pitchFamily="34" charset="0"/>
+                <a:ea typeface="Cambria" pitchFamily="34" charset="-122"/>
+                <a:cs typeface="Cambria" pitchFamily="34" charset="-120"/>
+              </a:rPr>
+              <a:t>Identificación de firmas</a:t>
+            </a:r>
+            <a:endParaRPr lang="en-US" sz="1600" dirty="0"/>
+          </a:p>
+        </p:txBody>
+      </p:sp>
+      <p:sp>
+        <p:nvSpPr>
+          <p:cNvPr id="14" name="Text 12"/>
+          <p:cNvSpPr/>
+          <p:nvPr/>
+        </p:nvSpPr>
+        <p:spPr>
+          <a:xfrm>
+            <a:off x="4663440" y="3108960"/>
+            <a:ext cx="2871216" cy="1572768"/>
           </a:xfrm>
           <a:prstGeom prst="rect">
             <a:avLst/>
@@ -9396,69 +10316,76 @@
               <a:buNone/>
             </a:pPr>
             <a:r>
-              <a:rPr lang="en-US" sz="1400" b="1" dirty="0">
-                <a:solidFill>
-                  <a:srgbClr val="1A1D21"/>
+              <a:rPr lang="en-US" sz="1150" dirty="0">
+                <a:solidFill>
+                  <a:srgbClr val="52514E"/>
                 </a:solidFill>
                 <a:latin typeface="Calibri" pitchFamily="34" charset="0"/>
                 <a:ea typeface="Calibri" pitchFamily="34" charset="-122"/>
                 <a:cs typeface="Calibri" pitchFamily="34" charset="-120"/>
               </a:rPr>
-              <a:t>Identificar biomarcadores universales de cáncer de pulmón</a:t>
-            </a:r>
+              <a:t>Análisis diferencial por cohorte (t de Welch, FDR), meta-análisis de consistencia direccional y modelos supervisados con penalización L1 para seleccionar genes.</a:t>
+            </a:r>
+            <a:endParaRPr lang="en-US" sz="1150" dirty="0"/>
+          </a:p>
+        </p:txBody>
+      </p:sp>
+      <p:sp>
+        <p:nvSpPr>
+          <p:cNvPr id="15" name="Text 13"/>
+          <p:cNvSpPr/>
+          <p:nvPr/>
+        </p:nvSpPr>
+        <p:spPr>
+          <a:xfrm>
+            <a:off x="4663440" y="4754880"/>
+            <a:ext cx="2871216" cy="640080"/>
+          </a:xfrm>
+          <a:prstGeom prst="rect">
+            <a:avLst/>
+          </a:prstGeom>
+          <a:noFill/>
+          <a:ln/>
+        </p:spPr>
+        <p:txBody>
+          <a:bodyPr wrap="square" lIns="0" tIns="0" rIns="0" bIns="0" rtlCol="0" anchor="t"/>
+          <a:lstStyle/>
+          <a:p>
             <a:pPr indent="0" marL="0">
               <a:lnSpc>
-                <a:spcPct val="124000"/>
+                <a:spcPct val="120000"/>
               </a:lnSpc>
               <a:buNone/>
             </a:pPr>
-            <a:endParaRPr lang="en-US" sz="1400" dirty="0"/>
-          </a:p>
-          <a:p>
-            <a:pPr indent="0" marL="0">
-              <a:lnSpc>
-                <a:spcPct val="124000"/>
-              </a:lnSpc>
-              <a:buNone/>
-            </a:pPr>
-            <a:endParaRPr lang="en-US" sz="1400" dirty="0"/>
-          </a:p>
-          <a:p>
-            <a:pPr indent="0" marL="0">
-              <a:lnSpc>
-                <a:spcPct val="124000"/>
-              </a:lnSpc>
-              <a:buNone/>
-            </a:pPr>
-            <a:r>
-              <a:rPr lang="en-US" sz="1250" dirty="0">
-                <a:solidFill>
-                  <a:srgbClr val="52514E"/>
+            <a:r>
+              <a:rPr lang="en-US" sz="1050" b="1" i="1" dirty="0">
+                <a:solidFill>
+                  <a:srgbClr val="1A1D21"/>
                 </a:solidFill>
                 <a:latin typeface="Calibri" pitchFamily="34" charset="0"/>
                 <a:ea typeface="Calibri" pitchFamily="34" charset="-122"/>
                 <a:cs typeface="Calibri" pitchFamily="34" charset="-120"/>
               </a:rPr>
-              <a:t>Meta-análisis de 13 cohortes, consenso direccional, validación LODO. Firma final encabezada por SLC6A4, KANK3, TOX3 y S100A10.</a:t>
-            </a:r>
-            <a:endParaRPr lang="en-US" sz="1400" dirty="0"/>
-          </a:p>
-        </p:txBody>
-      </p:sp>
-      <p:sp>
-        <p:nvSpPr>
-          <p:cNvPr id="7" name="Shape 5"/>
-          <p:cNvSpPr/>
-          <p:nvPr/>
-        </p:nvSpPr>
-        <p:spPr>
-          <a:xfrm>
-            <a:off x="6382512" y="1874520"/>
-            <a:ext cx="5120640" cy="3566160"/>
+              <a:t>Salida: 1174 genes validados, panel mínimo de 20.</a:t>
+            </a:r>
+            <a:endParaRPr lang="en-US" sz="1050" dirty="0"/>
+          </a:p>
+        </p:txBody>
+      </p:sp>
+      <p:sp>
+        <p:nvSpPr>
+          <p:cNvPr id="16" name="Shape 14"/>
+          <p:cNvSpPr/>
+          <p:nvPr/>
+        </p:nvSpPr>
+        <p:spPr>
+          <a:xfrm>
+            <a:off x="8083296" y="1874520"/>
+            <a:ext cx="3456432" cy="3703320"/>
           </a:xfrm>
           <a:prstGeom prst="roundRect">
             <a:avLst>
-              <a:gd name="adj" fmla="val 1538"/>
+              <a:gd name="adj" fmla="val 1587"/>
             </a:avLst>
           </a:prstGeom>
           <a:solidFill>
@@ -9481,14 +10408,39 @@
       </p:sp>
       <p:sp>
         <p:nvSpPr>
-          <p:cNvPr id="8" name="Text 6"/>
-          <p:cNvSpPr/>
-          <p:nvPr/>
-        </p:nvSpPr>
-        <p:spPr>
-          <a:xfrm>
-            <a:off x="6693408" y="2139696"/>
-            <a:ext cx="4526280" cy="256032"/>
+          <p:cNvPr id="17" name="Shape 15"/>
+          <p:cNvSpPr/>
+          <p:nvPr/>
+        </p:nvSpPr>
+        <p:spPr>
+          <a:xfrm>
+            <a:off x="8375904" y="2121408"/>
+            <a:ext cx="402336" cy="402336"/>
+          </a:xfrm>
+          <a:prstGeom prst="ellipse">
+            <a:avLst/>
+          </a:prstGeom>
+          <a:solidFill>
+            <a:srgbClr val="262A30"/>
+          </a:solidFill>
+          <a:ln w="12700">
+            <a:solidFill>
+              <a:srgbClr val="2A78D6"/>
+            </a:solidFill>
+            <a:prstDash val="solid"/>
+          </a:ln>
+        </p:spPr>
+      </p:sp>
+      <p:sp>
+        <p:nvSpPr>
+          <p:cNvPr id="18" name="Text 16"/>
+          <p:cNvSpPr/>
+          <p:nvPr/>
+        </p:nvSpPr>
+        <p:spPr>
+          <a:xfrm>
+            <a:off x="8375904" y="2121408"/>
+            <a:ext cx="402336" cy="402336"/>
           </a:xfrm>
           <a:prstGeom prst="rect">
             <a:avLst/>
@@ -9500,34 +10452,115 @@
           <a:bodyPr wrap="square" lIns="0" tIns="0" rIns="0" bIns="0" rtlCol="0" anchor="ctr"/>
           <a:lstStyle/>
           <a:p>
-            <a:pPr indent="0" marL="0">
-              <a:buNone/>
-            </a:pPr>
-            <a:r>
-              <a:rPr lang="en-US" sz="1000" b="1" spc="180" kern="0" dirty="0">
-                <a:solidFill>
-                  <a:srgbClr val="898781"/>
+            <a:pPr algn="ctr" indent="0" marL="0">
+              <a:buNone/>
+            </a:pPr>
+            <a:r>
+              <a:rPr lang="en-US" sz="1400" b="1" dirty="0">
+                <a:solidFill>
+                  <a:srgbClr val="2A78D6"/>
+                </a:solidFill>
+                <a:latin typeface="Cambria" pitchFamily="34" charset="0"/>
+                <a:ea typeface="Cambria" pitchFamily="34" charset="-122"/>
+                <a:cs typeface="Cambria" pitchFamily="34" charset="-120"/>
+              </a:rPr>
+              <a:t>3</a:t>
+            </a:r>
+            <a:endParaRPr lang="en-US" sz="1400" dirty="0"/>
+          </a:p>
+        </p:txBody>
+      </p:sp>
+      <p:sp>
+        <p:nvSpPr>
+          <p:cNvPr id="19" name="Text 17"/>
+          <p:cNvSpPr/>
+          <p:nvPr/>
+        </p:nvSpPr>
+        <p:spPr>
+          <a:xfrm>
+            <a:off x="8375904" y="2651760"/>
+            <a:ext cx="2871216" cy="365760"/>
+          </a:xfrm>
+          <a:prstGeom prst="rect">
+            <a:avLst/>
+          </a:prstGeom>
+          <a:noFill/>
+          <a:ln/>
+        </p:spPr>
+        <p:txBody>
+          <a:bodyPr wrap="square" lIns="0" tIns="0" rIns="0" bIns="0" rtlCol="0" anchor="t"/>
+          <a:lstStyle/>
+          <a:p>
+            <a:pPr indent="0" marL="0">
+              <a:buNone/>
+            </a:pPr>
+            <a:r>
+              <a:rPr lang="en-US" sz="1600" b="1" dirty="0">
+                <a:solidFill>
+                  <a:srgbClr val="FFFFFF"/>
+                </a:solidFill>
+                <a:latin typeface="Cambria" pitchFamily="34" charset="0"/>
+                <a:ea typeface="Cambria" pitchFamily="34" charset="-122"/>
+                <a:cs typeface="Cambria" pitchFamily="34" charset="-120"/>
+              </a:rPr>
+              <a:t>Validación</a:t>
+            </a:r>
+            <a:endParaRPr lang="en-US" sz="1600" dirty="0"/>
+          </a:p>
+        </p:txBody>
+      </p:sp>
+      <p:sp>
+        <p:nvSpPr>
+          <p:cNvPr id="20" name="Text 18"/>
+          <p:cNvSpPr/>
+          <p:nvPr/>
+        </p:nvSpPr>
+        <p:spPr>
+          <a:xfrm>
+            <a:off x="8375904" y="3108960"/>
+            <a:ext cx="2871216" cy="1572768"/>
+          </a:xfrm>
+          <a:prstGeom prst="rect">
+            <a:avLst/>
+          </a:prstGeom>
+          <a:noFill/>
+          <a:ln/>
+        </p:spPr>
+        <p:txBody>
+          <a:bodyPr wrap="square" lIns="0" tIns="0" rIns="0" bIns="0" rtlCol="0" anchor="t"/>
+          <a:lstStyle/>
+          <a:p>
+            <a:pPr indent="0" marL="0">
+              <a:lnSpc>
+                <a:spcPct val="124000"/>
+              </a:lnSpc>
+              <a:buNone/>
+            </a:pPr>
+            <a:r>
+              <a:rPr lang="en-US" sz="1150" dirty="0">
+                <a:solidFill>
+                  <a:srgbClr val="C3C2B7"/>
                 </a:solidFill>
                 <a:latin typeface="Calibri" pitchFamily="34" charset="0"/>
                 <a:ea typeface="Calibri" pitchFamily="34" charset="-122"/>
                 <a:cs typeface="Calibri" pitchFamily="34" charset="-120"/>
               </a:rPr>
-              <a:t>LO QUE LOS DATOS PERMITÍAN AFIRMAR</a:t>
-            </a:r>
-            <a:endParaRPr lang="en-US" sz="1000" dirty="0"/>
-          </a:p>
-        </p:txBody>
-      </p:sp>
-      <p:sp>
-        <p:nvSpPr>
-          <p:cNvPr id="9" name="Text 7"/>
-          <p:cNvSpPr/>
-          <p:nvPr/>
-        </p:nvSpPr>
-        <p:spPr>
-          <a:xfrm>
-            <a:off x="6693408" y="2487168"/>
-            <a:ext cx="4526280" cy="2743200"/>
+              <a:t>Tamaño de efecto por cohorte, replicación entre entrenamientos disjuntos, validación externa LODO con baseline declarado, y contraste con marcadores clínicos conocidos.</a:t>
+            </a:r>
+            <a:endParaRPr lang="en-US" sz="1150" dirty="0"/>
+          </a:p>
+        </p:txBody>
+      </p:sp>
+      <p:sp>
+        <p:nvSpPr>
+          <p:cNvPr id="21" name="Text 19"/>
+          <p:cNvSpPr/>
+          <p:nvPr/>
+        </p:nvSpPr>
+        <p:spPr>
+          <a:xfrm>
+            <a:off x="8375904" y="4754880"/>
+            <a:ext cx="2871216" cy="640080"/>
           </a:xfrm>
           <a:prstGeom prst="rect">
             <a:avLst/>
@@ -9541,69 +10574,34 @@
           <a:p>
             <a:pPr indent="0" marL="0">
               <a:lnSpc>
-                <a:spcPct val="124000"/>
+                <a:spcPct val="120000"/>
               </a:lnSpc>
               <a:buNone/>
             </a:pPr>
             <a:r>
-              <a:rPr lang="en-US" sz="1400" b="1" dirty="0">
-                <a:solidFill>
-                  <a:srgbClr val="FFFFFF"/>
+              <a:rPr lang="en-US" sz="1050" b="1" i="1" dirty="0">
+                <a:solidFill>
+                  <a:srgbClr val="2A78D6"/>
                 </a:solidFill>
                 <a:latin typeface="Calibri" pitchFamily="34" charset="0"/>
                 <a:ea typeface="Calibri" pitchFamily="34" charset="-122"/>
                 <a:cs typeface="Calibri" pitchFamily="34" charset="-120"/>
               </a:rPr>
-              <a:t>Caracterizar cómo fallan los pipelines sin emitir ningún error</a:t>
-            </a:r>
-            <a:pPr indent="0" marL="0">
-              <a:lnSpc>
-                <a:spcPct val="124000"/>
-              </a:lnSpc>
-              <a:buNone/>
-            </a:pPr>
-            <a:endParaRPr lang="en-US" sz="1400" dirty="0"/>
-          </a:p>
-          <a:p>
-            <a:pPr indent="0" marL="0">
-              <a:lnSpc>
-                <a:spcPct val="124000"/>
-              </a:lnSpc>
-              <a:buNone/>
-            </a:pPr>
-            <a:endParaRPr lang="en-US" sz="1400" dirty="0"/>
-          </a:p>
-          <a:p>
-            <a:pPr indent="0" marL="0">
-              <a:lnSpc>
-                <a:spcPct val="124000"/>
-              </a:lnSpc>
-              <a:buNone/>
-            </a:pPr>
-            <a:r>
-              <a:rPr lang="en-US" sz="1250" dirty="0">
-                <a:solidFill>
-                  <a:srgbClr val="C3C2B7"/>
-                </a:solidFill>
-                <a:latin typeface="Calibri" pitchFamily="34" charset="0"/>
-                <a:ea typeface="Calibri" pitchFamily="34" charset="-122"/>
-                <a:cs typeface="Calibri" pitchFamily="34" charset="-120"/>
-              </a:rPr>
-              <a:t>La firma medía composición del tejido, su estabilidad era un artefacto del diseño de validación, y distinguir tumor de pulmón sano no es un problema clínico: lo resuelve una H&amp;E.</a:t>
-            </a:r>
-            <a:endParaRPr lang="en-US" sz="1400" dirty="0"/>
-          </a:p>
-        </p:txBody>
-      </p:sp>
-      <p:sp>
-        <p:nvSpPr>
-          <p:cNvPr id="10" name="Text 8"/>
-          <p:cNvSpPr/>
-          <p:nvPr/>
-        </p:nvSpPr>
-        <p:spPr>
-          <a:xfrm>
-            <a:off x="658368" y="5687568"/>
+              <a:t>Es la capa que este trabajo aporta, y la que decide.</a:t>
+            </a:r>
+            <a:endParaRPr lang="en-US" sz="1050" dirty="0"/>
+          </a:p>
+        </p:txBody>
+      </p:sp>
+      <p:sp>
+        <p:nvSpPr>
+          <p:cNvPr id="22" name="Text 20"/>
+          <p:cNvSpPr/>
+          <p:nvPr/>
+        </p:nvSpPr>
+        <p:spPr>
+          <a:xfrm>
+            <a:off x="658368" y="5815584"/>
             <a:ext cx="10844784" cy="457200"/>
           </a:xfrm>
           <a:prstGeom prst="rect">
@@ -9628,7 +10626,7 @@
                 <a:ea typeface="Cambria" pitchFamily="34" charset="-122"/>
                 <a:cs typeface="Cambria" pitchFamily="34" charset="-120"/>
               </a:rPr>
-              <a:t>El framework no se descarta: funciona. Lo que se descarta es la lectura que se había hecho de sus resultados.</a:t>
+              <a:t>Sin la tercera capa, el framework habría entregado una firma que no replica. Con ella, entrega una que sí.</a:t>
             </a:r>
             <a:endParaRPr lang="en-US" sz="1450" dirty="0"/>
           </a:p>
